--- a/assets/pa45/P009_PA45_SharePointTeams_20260507.pptx
+++ b/assets/pa45/P009_PA45_SharePointTeams_20260507.pptx
@@ -9,6 +9,7 @@
   </p:notesMasterIdLst>
   <p:sldIdLst>
     <p:sldId id="279" r:id="rId2"/>
+    <p:sldId id="285" r:id="rId21"/>
     <p:sldId id="259" r:id="rId3"/>
     <p:sldId id="257" r:id="rId4"/>
     <p:sldId id="256" r:id="rId5"/>
@@ -4310,8 +4311,8 @@
         </p:nvSpPr>
         <p:spPr>
           <a:xfrm>
-            <a:off x="5142585" y="5398054"/>
-            <a:ext cx="2873045" cy="792176"/>
+            <a:off x="4714569" y="5398054"/>
+            <a:ext cx="3301062" cy="792176"/>
           </a:xfrm>
           <a:prstGeom prst="rect">
             <a:avLst/>
@@ -4512,8 +4513,8 @@
         </p:nvSpPr>
         <p:spPr>
           <a:xfrm>
-            <a:off x="9873167" y="2215734"/>
-            <a:ext cx="2215199" cy="775966"/>
+            <a:off x="9635613" y="2215734"/>
+            <a:ext cx="2452753" cy="775966"/>
           </a:xfrm>
           <a:prstGeom prst="rect">
             <a:avLst/>
@@ -5859,45 +5860,6 @@
           </a:p>
         </p:txBody>
       </p:sp>
-      <p:sp>
-        <p:nvSpPr>
-          <p:cNvPr id="22" name="Text 14"/>
-          <p:cNvSpPr txBox="1"/>
-          <p:nvPr/>
-        </p:nvSpPr>
-        <p:spPr>
-          <a:xfrm>
-            <a:off x="7149084" y="2023610"/>
-            <a:ext cx="3646932" cy="457199"/>
-          </a:xfrm>
-          <a:prstGeom prst="rect">
-            <a:avLst/>
-          </a:prstGeom>
-          <a:noFill/>
-          <a:ln/>
-        </p:spPr>
-        <p:txBody>
-          <a:bodyPr wrap="square" lIns="0" tIns="0" rIns="0" bIns="0" rtlCol="0" anchor="ctr"/>
-          <a:lstStyle/>
-          <a:p>
-            <a:pPr marL="0" indent="0" algn="ctr">
-              <a:buNone/>
-            </a:pPr>
-            <a:r>
-              <a:rPr lang="en-US" dirty="0">
-                <a:solidFill>
-                  <a:srgbClr val="6B7280"/>
-                </a:solidFill>
-                <a:latin typeface="Noto Sans JP" pitchFamily="34" charset="0"/>
-                <a:ea typeface="Noto Sans JP" pitchFamily="34" charset="-122"/>
-                <a:cs typeface="Noto Sans JP" pitchFamily="34" charset="-120"/>
-              </a:rPr>
-              <a:t>今日のアクション名 ＋ 開催日入り</a:t>
-            </a:r>
-            <a:endParaRPr lang="en-US" dirty="0"/>
-          </a:p>
-        </p:txBody>
-      </p:sp>
       <p:pic>
         <p:nvPicPr>
           <p:cNvPr id="23" name="Image 6" descr="preencoded.png"/>
@@ -6630,6 +6592,345 @@
 </p:sld>
 </file>
 
+<file path=ppt/slides/slide13.xml><?xml version="1.0" encoding="utf-8"?>
+<p:sld xmlns:a="http://schemas.openxmlformats.org/drawingml/2006/main" xmlns:p="http://schemas.openxmlformats.org/presentationml/2006/main" xmlns:r="http://schemas.openxmlformats.org/officeDocument/2006/relationships">
+  <p:cSld>
+    <p:bg>
+      <p:bgPr>
+        <a:solidFill>
+          <a:srgbClr val="F5FAFF"/>
+        </a:solidFill>
+        <a:effectLst/>
+      </p:bgPr>
+    </p:bg>
+    <p:spTree>
+      <p:nvGrpSpPr>
+        <p:cNvPr id="1" name=""/>
+        <p:cNvGrpSpPr/>
+        <p:nvPr/>
+      </p:nvGrpSpPr>
+      <p:grpSpPr/>
+      <p:sp>
+        <p:nvSpPr>
+          <p:cNvPr id="2" name="Rectangle 1"/>
+          <p:cNvSpPr/>
+          <p:nvPr/>
+        </p:nvSpPr>
+        <p:spPr>
+          <a:xfrm>
+            <a:off x="0" y="0"/>
+            <a:ext cx="12192000" cy="1097280"/>
+          </a:xfrm>
+          <a:prstGeom prst="rect">
+            <a:avLst/>
+          </a:prstGeom>
+          <a:solidFill>
+            <a:srgbClr val="2A7DD4"/>
+          </a:solidFill>
+          <a:ln>
+            <a:noFill/>
+          </a:ln>
+        </p:spPr>
+        <p:style>
+          <a:lnRef idx="1">
+            <a:schemeClr val="accent1"/>
+          </a:lnRef>
+          <a:fillRef idx="3">
+            <a:schemeClr val="accent1"/>
+          </a:fillRef>
+          <a:effectRef idx="2">
+            <a:schemeClr val="accent1"/>
+          </a:effectRef>
+          <a:fontRef idx="minor">
+            <a:schemeClr val="lt1"/>
+          </a:fontRef>
+        </p:style>
+        <p:txBody>
+          <a:bodyPr rtlCol="0" anchor="ctr" lIns="548640" tIns="228600"/>
+          <a:lstStyle/>
+          <a:p>
+            <a:pPr algn="ctr"/>
+            <a:r>
+              <a:rPr sz="2800" b="1">
+                <a:solidFill>
+                  <a:srgbClr val="FFFFFF"/>
+                </a:solidFill>
+              </a:rPr>
+              <a:t>🛠️ ハンズオン 事前準備のお願い（3分でできます）</a:t>
+            </a:r>
+          </a:p>
+        </p:txBody>
+      </p:sp>
+      <p:sp>
+        <p:nvSpPr>
+          <p:cNvPr id="3" name="TextBox 2"/>
+          <p:cNvSpPr txBox="1"/>
+          <p:nvPr/>
+        </p:nvSpPr>
+        <p:spPr>
+          <a:xfrm>
+            <a:off x="548640" y="1371600"/>
+            <a:ext cx="11094720" cy="548640"/>
+          </a:xfrm>
+          <a:prstGeom prst="rect">
+            <a:avLst/>
+          </a:prstGeom>
+          <a:noFill/>
+        </p:spPr>
+        <p:txBody>
+          <a:bodyPr wrap="none">
+            <a:spAutoFit/>
+          </a:bodyPr>
+          <a:lstStyle/>
+          <a:p>
+            <a:r>
+              <a:rPr sz="1600">
+                <a:solidFill>
+                  <a:srgbClr val="333333"/>
+                </a:solidFill>
+              </a:rPr>
+              <a:t>当日のハンズオンで使う「承認用サンプルExcel」を、事前にご自身のSharePointに配置してください</a:t>
+            </a:r>
+          </a:p>
+        </p:txBody>
+      </p:sp>
+      <p:sp>
+        <p:nvSpPr>
+          <p:cNvPr id="4" name="Rounded Rectangle 3"/>
+          <p:cNvSpPr/>
+          <p:nvPr/>
+        </p:nvSpPr>
+        <p:spPr>
+          <a:xfrm>
+            <a:off x="548640" y="2103120"/>
+            <a:ext cx="11094720" cy="1463040"/>
+          </a:xfrm>
+          <a:prstGeom prst="roundRect">
+            <a:avLst/>
+          </a:prstGeom>
+          <a:solidFill>
+            <a:srgbClr val="FFFFFF"/>
+          </a:solidFill>
+          <a:ln w="19050">
+            <a:solidFill>
+              <a:srgbClr val="2A7DD4"/>
+            </a:solidFill>
+          </a:ln>
+        </p:spPr>
+        <p:style>
+          <a:lnRef idx="1">
+            <a:schemeClr val="accent1"/>
+          </a:lnRef>
+          <a:fillRef idx="3">
+            <a:schemeClr val="accent1"/>
+          </a:fillRef>
+          <a:effectRef idx="2">
+            <a:schemeClr val="accent1"/>
+          </a:effectRef>
+          <a:fontRef idx="minor">
+            <a:schemeClr val="lt1"/>
+          </a:fontRef>
+        </p:style>
+        <p:txBody>
+          <a:bodyPr rtlCol="0" anchor="ctr" lIns="274320" tIns="182880" wrap="square"/>
+          <a:lstStyle/>
+          <a:p>
+            <a:pPr algn="ctr"/>
+            <a:r>
+              <a:rPr sz="2000" b="1">
+                <a:solidFill>
+                  <a:srgbClr val="2A7DD4"/>
+                </a:solidFill>
+              </a:rPr>
+              <a:t>STEP 1   サンプルExcelをダウンロード</a:t>
+            </a:r>
+          </a:p>
+          <a:p>
+            <a:pPr>
+              <a:spcBef>
+                <a:spcPts val="800"/>
+              </a:spcBef>
+            </a:pPr>
+            <a:r>
+              <a:rPr sz="1300">
+                <a:solidFill>
+                  <a:srgbClr val="555555"/>
+                </a:solidFill>
+              </a:rPr>
+              <a:t>👇 下のURLをブラウザに貼り付けてください</a:t>
+            </a:r>
+          </a:p>
+          <a:p>
+            <a:pPr>
+              <a:spcBef>
+                <a:spcPts val="400"/>
+              </a:spcBef>
+            </a:pPr>
+            <a:r>
+              <a:rPr sz="1500" b="1">
+                <a:solidFill>
+                  <a:srgbClr val="1A6BBF"/>
+                </a:solidFill>
+              </a:rPr>
+              <a:t>https://haru-powerplatform.github.io/pa45/flows/vol-09/approval-sample.xlsx</a:t>
+            </a:r>
+          </a:p>
+        </p:txBody>
+      </p:sp>
+      <p:sp>
+        <p:nvSpPr>
+          <p:cNvPr id="5" name="Rounded Rectangle 4"/>
+          <p:cNvSpPr/>
+          <p:nvPr/>
+        </p:nvSpPr>
+        <p:spPr>
+          <a:xfrm>
+            <a:off x="548640" y="3749039"/>
+            <a:ext cx="11094720" cy="2103120"/>
+          </a:xfrm>
+          <a:prstGeom prst="roundRect">
+            <a:avLst/>
+          </a:prstGeom>
+          <a:solidFill>
+            <a:srgbClr val="FFFFFF"/>
+          </a:solidFill>
+          <a:ln w="19050">
+            <a:solidFill>
+              <a:srgbClr val="2A7DD4"/>
+            </a:solidFill>
+          </a:ln>
+        </p:spPr>
+        <p:style>
+          <a:lnRef idx="1">
+            <a:schemeClr val="accent1"/>
+          </a:lnRef>
+          <a:fillRef idx="3">
+            <a:schemeClr val="accent1"/>
+          </a:fillRef>
+          <a:effectRef idx="2">
+            <a:schemeClr val="accent1"/>
+          </a:effectRef>
+          <a:fontRef idx="minor">
+            <a:schemeClr val="lt1"/>
+          </a:fontRef>
+        </p:style>
+        <p:txBody>
+          <a:bodyPr rtlCol="0" anchor="ctr" lIns="274320" tIns="182880" wrap="square"/>
+          <a:lstStyle/>
+          <a:p>
+            <a:pPr algn="ctr"/>
+            <a:r>
+              <a:rPr sz="2000" b="1">
+                <a:solidFill>
+                  <a:srgbClr val="2A7DD4"/>
+                </a:solidFill>
+              </a:rPr>
+              <a:t>STEP 2   ご自身のSharePointにアップロード</a:t>
+            </a:r>
+          </a:p>
+          <a:p>
+            <a:pPr>
+              <a:spcBef>
+                <a:spcPts val="400"/>
+              </a:spcBef>
+            </a:pPr>
+            <a:r>
+              <a:rPr sz="1400">
+                <a:solidFill>
+                  <a:srgbClr val="333333"/>
+                </a:solidFill>
+              </a:rPr>
+              <a:t>①  編集権限のあるSharePointサイトを開く（社内サイト・チームサイト等）</a:t>
+            </a:r>
+          </a:p>
+          <a:p>
+            <a:pPr>
+              <a:spcBef>
+                <a:spcPts val="400"/>
+              </a:spcBef>
+            </a:pPr>
+            <a:r>
+              <a:rPr sz="1400">
+                <a:solidFill>
+                  <a:srgbClr val="333333"/>
+                </a:solidFill>
+              </a:rPr>
+              <a:t>②  「ドキュメント」ライブラリを開く</a:t>
+            </a:r>
+          </a:p>
+          <a:p>
+            <a:pPr>
+              <a:spcBef>
+                <a:spcPts val="400"/>
+              </a:spcBef>
+            </a:pPr>
+            <a:r>
+              <a:rPr sz="1400">
+                <a:solidFill>
+                  <a:srgbClr val="333333"/>
+                </a:solidFill>
+              </a:rPr>
+              <a:t>③  「アップロード → ファイル」で approval-sample.xlsx を選択</a:t>
+            </a:r>
+          </a:p>
+          <a:p>
+            <a:pPr>
+              <a:spcBef>
+                <a:spcPts val="400"/>
+              </a:spcBef>
+            </a:pPr>
+            <a:r>
+              <a:rPr sz="1400">
+                <a:solidFill>
+                  <a:srgbClr val="333333"/>
+                </a:solidFill>
+              </a:rPr>
+              <a:t>④  完了！  当日はこのファイルを上司役で更新する想定でフローを作ります</a:t>
+            </a:r>
+          </a:p>
+        </p:txBody>
+      </p:sp>
+      <p:sp>
+        <p:nvSpPr>
+          <p:cNvPr id="6" name="TextBox 5"/>
+          <p:cNvSpPr txBox="1"/>
+          <p:nvPr/>
+        </p:nvSpPr>
+        <p:spPr>
+          <a:xfrm>
+            <a:off x="548640" y="6035040"/>
+            <a:ext cx="11094720" cy="457200"/>
+          </a:xfrm>
+          <a:prstGeom prst="rect">
+            <a:avLst/>
+          </a:prstGeom>
+          <a:noFill/>
+        </p:spPr>
+        <p:txBody>
+          <a:bodyPr wrap="none">
+            <a:spAutoFit/>
+          </a:bodyPr>
+          <a:lstStyle/>
+          <a:p>
+            <a:r>
+              <a:rPr sz="1200" i="1">
+                <a:solidFill>
+                  <a:srgbClr val="888888"/>
+                </a:solidFill>
+              </a:rPr>
+              <a:t>※ 配置済みだとハンズオンに専念できます。当日その場で配置してもOK！</a:t>
+            </a:r>
+          </a:p>
+        </p:txBody>
+      </p:sp>
+    </p:spTree>
+  </p:cSld>
+  <p:clrMapOvr>
+    <a:masterClrMapping/>
+  </p:clrMapOvr>
+</p:sld>
+</file>
+
 <file path=ppt/slides/slide2.xml><?xml version="1.0" encoding="utf-8"?>
 <p:sld xmlns:a="http://schemas.openxmlformats.org/drawingml/2006/main" xmlns:r="http://schemas.openxmlformats.org/officeDocument/2006/relationships" xmlns:p="http://schemas.openxmlformats.org/presentationml/2006/main">
   <p:cSld name="Slide 4">
@@ -7273,8 +7574,8 @@
         </p:nvSpPr>
         <p:spPr>
           <a:xfrm>
-            <a:off x="1143000" y="5273596"/>
-            <a:ext cx="6648602" cy="286207"/>
+            <a:off x="1142999" y="5273596"/>
+            <a:ext cx="7795029" cy="286207"/>
           </a:xfrm>
           <a:prstGeom prst="rect">
             <a:avLst/>
@@ -16441,86 +16742,6 @@
           </a:p>
         </p:txBody>
       </p:sp>
-      <p:pic>
-        <p:nvPicPr>
-          <p:cNvPr id="12" name="図 11" descr="The image depicts a user interface with a dialogue box, showing steps for submitting a new response, obtaining detailed cost information, and awaiting approval from a supervisor.&#10;&#10;AI 生成コンテンツは誤りを含む可能性があります。">
-            <a:extLst>
-              <a:ext uri="{FF2B5EF4-FFF2-40B4-BE49-F238E27FC236}">
-                <a16:creationId xmlns:a16="http://schemas.microsoft.com/office/drawing/2014/main" id="{3E6630DE-036E-A137-BB8D-3B6889FA8E99}"/>
-              </a:ext>
-            </a:extLst>
-          </p:cNvPr>
-          <p:cNvPicPr>
-            <a:picLocks noChangeAspect="1"/>
-          </p:cNvPicPr>
-          <p:nvPr/>
-        </p:nvPicPr>
-        <p:blipFill>
-          <a:blip r:embed="rId2"/>
-          <a:stretch>
-            <a:fillRect/>
-          </a:stretch>
-        </p:blipFill>
-        <p:spPr>
-          <a:xfrm>
-            <a:off x="5199100" y="2017875"/>
-            <a:ext cx="2085990" cy="3257574"/>
-          </a:xfrm>
-          <a:prstGeom prst="rect">
-            <a:avLst/>
-          </a:prstGeom>
-          <a:ln>
-            <a:noFill/>
-          </a:ln>
-          <a:effectLst>
-            <a:outerShdw blurRad="190500" algn="tl" rotWithShape="0">
-              <a:srgbClr val="000000">
-                <a:alpha val="70000"/>
-              </a:srgbClr>
-            </a:outerShdw>
-          </a:effectLst>
-        </p:spPr>
-      </p:pic>
-      <p:pic>
-        <p:nvPicPr>
-          <p:cNvPr id="15" name="図 14" descr="The image displays a flowchart with decision branches, indicating a process for approving or rejecting messages based on certain conditions, followed by notifications to the requester.&#10;&#10;AI 生成コンテンツは誤りを含む可能性があります。">
-            <a:extLst>
-              <a:ext uri="{FF2B5EF4-FFF2-40B4-BE49-F238E27FC236}">
-                <a16:creationId xmlns:a16="http://schemas.microsoft.com/office/drawing/2014/main" id="{0A496CAA-10CA-2625-8307-AD86EA5E849F}"/>
-              </a:ext>
-            </a:extLst>
-          </p:cNvPr>
-          <p:cNvPicPr>
-            <a:picLocks noChangeAspect="1"/>
-          </p:cNvPicPr>
-          <p:nvPr/>
-        </p:nvPicPr>
-        <p:blipFill>
-          <a:blip r:embed="rId3"/>
-          <a:stretch>
-            <a:fillRect/>
-          </a:stretch>
-        </p:blipFill>
-        <p:spPr>
-          <a:xfrm>
-            <a:off x="8012690" y="2648639"/>
-            <a:ext cx="3950113" cy="2723461"/>
-          </a:xfrm>
-          <a:prstGeom prst="rect">
-            <a:avLst/>
-          </a:prstGeom>
-          <a:ln>
-            <a:noFill/>
-          </a:ln>
-          <a:effectLst>
-            <a:outerShdw blurRad="190500" algn="tl" rotWithShape="0">
-              <a:srgbClr val="000000">
-                <a:alpha val="70000"/>
-              </a:srgbClr>
-            </a:outerShdw>
-          </a:effectLst>
-        </p:spPr>
-      </p:pic>
     </p:spTree>
   </p:cSld>
   <p:clrMapOvr>

--- a/assets/pa45/P009_PA45_SharePointTeams_20260507.pptx
+++ b/assets/pa45/P009_PA45_SharePointTeams_20260507.pptx
@@ -5,22 +5,22 @@
     <p:sldMasterId id="2147483648" r:id="rId1"/>
   </p:sldMasterIdLst>
   <p:notesMasterIdLst>
-    <p:notesMasterId r:id="rId14"/>
+    <p:notesMasterId r:id="rId15"/>
   </p:notesMasterIdLst>
   <p:sldIdLst>
     <p:sldId id="279" r:id="rId2"/>
-    <p:sldId id="285" r:id="rId21"/>
-    <p:sldId id="259" r:id="rId3"/>
-    <p:sldId id="257" r:id="rId4"/>
-    <p:sldId id="256" r:id="rId5"/>
-    <p:sldId id="271" r:id="rId6"/>
-    <p:sldId id="261" r:id="rId7"/>
-    <p:sldId id="280" r:id="rId8"/>
-    <p:sldId id="282" r:id="rId9"/>
-    <p:sldId id="284" r:id="rId10"/>
-    <p:sldId id="272" r:id="rId11"/>
-    <p:sldId id="268" r:id="rId12"/>
-    <p:sldId id="269" r:id="rId13"/>
+    <p:sldId id="285" r:id="rId3"/>
+    <p:sldId id="259" r:id="rId4"/>
+    <p:sldId id="257" r:id="rId5"/>
+    <p:sldId id="256" r:id="rId6"/>
+    <p:sldId id="271" r:id="rId7"/>
+    <p:sldId id="261" r:id="rId8"/>
+    <p:sldId id="280" r:id="rId9"/>
+    <p:sldId id="282" r:id="rId10"/>
+    <p:sldId id="284" r:id="rId11"/>
+    <p:sldId id="272" r:id="rId12"/>
+    <p:sldId id="268" r:id="rId13"/>
+    <p:sldId id="269" r:id="rId14"/>
   </p:sldIdLst>
   <p:sldSz cx="12192000" cy="6858000"/>
   <p:notesSz cx="6858000" cy="12192000"/>
@@ -868,7 +868,7 @@
           <a:p>
             <a:fld id="{F7021451-1387-4CA6-816F-3879F97B5CBC}" type="slidenum">
               <a:rPr lang="en-US"/>
-              <a:t>2</a:t>
+              <a:t>3</a:t>
             </a:fld>
             <a:endParaRPr lang="en-US"/>
           </a:p>
@@ -1003,7 +1003,7 @@
           <a:p>
             <a:fld id="{F7021451-1387-4CA6-816F-3879F97B5CBC}" type="slidenum">
               <a:rPr lang="en-US"/>
-              <a:t>3</a:t>
+              <a:t>4</a:t>
             </a:fld>
             <a:endParaRPr lang="en-US"/>
           </a:p>
@@ -1174,7 +1174,7 @@
           <a:p>
             <a:fld id="{F7021451-1387-4CA6-816F-3879F97B5CBC}" type="slidenum">
               <a:rPr lang="en-US"/>
-              <a:t>4</a:t>
+              <a:t>5</a:t>
             </a:fld>
             <a:endParaRPr lang="en-US"/>
           </a:p>
@@ -1312,7 +1312,7 @@
           <a:p>
             <a:fld id="{F7021451-1387-4CA6-816F-3879F97B5CBC}" type="slidenum">
               <a:rPr lang="en-US"/>
-              <a:t>5</a:t>
+              <a:t>6</a:t>
             </a:fld>
             <a:endParaRPr lang="en-US"/>
           </a:p>
@@ -1471,7 +1471,7 @@
           <a:p>
             <a:fld id="{F7021451-1387-4CA6-816F-3879F97B5CBC}" type="slidenum">
               <a:rPr lang="en-US"/>
-              <a:t>6</a:t>
+              <a:t>7</a:t>
             </a:fld>
             <a:endParaRPr lang="en-US"/>
           </a:p>
@@ -1642,7 +1642,7 @@
           <a:p>
             <a:fld id="{F7021451-1387-4CA6-816F-3879F97B5CBC}" type="slidenum">
               <a:rPr lang="en-US"/>
-              <a:t>10</a:t>
+              <a:t>11</a:t>
             </a:fld>
             <a:endParaRPr lang="en-US"/>
           </a:p>
@@ -1843,7 +1843,7 @@
           <a:p>
             <a:fld id="{F7021451-1387-4CA6-816F-3879F97B5CBC}" type="slidenum">
               <a:rPr lang="en-US"/>
-              <a:t>11</a:t>
+              <a:t>12</a:t>
             </a:fld>
             <a:endParaRPr lang="en-US"/>
           </a:p>
@@ -2014,7 +2014,7 @@
           <a:p>
             <a:fld id="{F7021451-1387-4CA6-816F-3879F97B5CBC}" type="slidenum">
               <a:rPr lang="en-US"/>
-              <a:t>12</a:t>
+              <a:t>13</a:t>
             </a:fld>
             <a:endParaRPr lang="en-US"/>
           </a:p>
@@ -2570,7 +2570,7 @@
             <a:avLst/>
           </a:prstGeom>
           <a:solidFill>
-            <a:srgbClr val="F0F0F0"/>
+            <a:srgbClr val="F3F4F6"/>
           </a:solidFill>
           <a:ln w="12700">
             <a:solidFill>
@@ -2614,6 +2614,698 @@
             </a:solidFill>
             <a:prstDash val="solid"/>
           </a:ln>
+          <a:effectLst>
+            <a:outerShdw blurRad="63500" dist="38100" dir="16200000" algn="bl" rotWithShape="0">
+              <a:srgbClr val="000000">
+                <a:alpha val="10000"/>
+              </a:srgbClr>
+            </a:outerShdw>
+          </a:effectLst>
+        </p:spPr>
+        <p:txBody>
+          <a:bodyPr/>
+          <a:lstStyle/>
+          <a:p>
+            <a:endParaRPr lang="ja-JP" altLang="en-US"/>
+          </a:p>
+        </p:txBody>
+      </p:sp>
+      <p:sp>
+        <p:nvSpPr>
+          <p:cNvPr id="4" name="Shape 2"/>
+          <p:cNvSpPr/>
+          <p:nvPr/>
+        </p:nvSpPr>
+        <p:spPr>
+          <a:xfrm>
+            <a:off x="0" y="0"/>
+            <a:ext cx="12191695" cy="1485900"/>
+          </a:xfrm>
+          <a:prstGeom prst="rect">
+            <a:avLst/>
+          </a:prstGeom>
+          <a:solidFill>
+            <a:srgbClr val="FFFFFF"/>
+          </a:solidFill>
+          <a:ln/>
+        </p:spPr>
+        <p:txBody>
+          <a:bodyPr/>
+          <a:lstStyle/>
+          <a:p>
+            <a:endParaRPr lang="ja-JP" altLang="en-US"/>
+          </a:p>
+        </p:txBody>
+      </p:sp>
+      <p:sp>
+        <p:nvSpPr>
+          <p:cNvPr id="5" name="Shape 3"/>
+          <p:cNvSpPr/>
+          <p:nvPr/>
+        </p:nvSpPr>
+        <p:spPr>
+          <a:xfrm>
+            <a:off x="0" y="1476756"/>
+            <a:ext cx="12191695" cy="9144"/>
+          </a:xfrm>
+          <a:prstGeom prst="rect">
+            <a:avLst/>
+          </a:prstGeom>
+          <a:solidFill>
+            <a:srgbClr val="F3F4F6"/>
+          </a:solidFill>
+          <a:ln w="12700">
+            <a:solidFill>
+              <a:srgbClr val="F3F4F6">
+                <a:alpha val="0"/>
+              </a:srgbClr>
+            </a:solidFill>
+            <a:prstDash val="solid"/>
+          </a:ln>
+        </p:spPr>
+        <p:txBody>
+          <a:bodyPr/>
+          <a:lstStyle/>
+          <a:p>
+            <a:endParaRPr lang="ja-JP" altLang="en-US"/>
+          </a:p>
+        </p:txBody>
+      </p:sp>
+      <p:sp>
+        <p:nvSpPr>
+          <p:cNvPr id="6" name="Text 4"/>
+          <p:cNvSpPr txBox="1"/>
+          <p:nvPr/>
+        </p:nvSpPr>
+        <p:spPr>
+          <a:xfrm>
+            <a:off x="457200" y="228600"/>
+            <a:ext cx="5600700" cy="267005"/>
+          </a:xfrm>
+          <a:prstGeom prst="rect">
+            <a:avLst/>
+          </a:prstGeom>
+          <a:noFill/>
+          <a:ln/>
+        </p:spPr>
+        <p:txBody>
+          <a:bodyPr wrap="square" lIns="0" tIns="0" rIns="0" bIns="0" rtlCol="0" anchor="ctr"/>
+          <a:lstStyle/>
+          <a:p>
+            <a:pPr marL="0" indent="0" algn="l">
+              <a:buNone/>
+            </a:pPr>
+            <a:r>
+              <a:rPr lang="en-US" sz="1600" b="1" kern="0" spc="150" dirty="0">
+                <a:solidFill>
+                  <a:srgbClr val="6B7280"/>
+                </a:solidFill>
+                <a:latin typeface="Noto Sans JP" pitchFamily="34" charset="0"/>
+                <a:ea typeface="Noto Sans JP" pitchFamily="34" charset="-122"/>
+                <a:cs typeface="Noto Sans JP" pitchFamily="34" charset="-120"/>
+              </a:rPr>
+              <a:t>PA45｜第9回</a:t>
+            </a:r>
+            <a:endParaRPr lang="en-US" sz="1500" dirty="0"/>
+          </a:p>
+        </p:txBody>
+      </p:sp>
+      <p:sp>
+        <p:nvSpPr>
+          <p:cNvPr id="8" name="Shape 6"/>
+          <p:cNvSpPr/>
+          <p:nvPr/>
+        </p:nvSpPr>
+        <p:spPr>
+          <a:xfrm>
+            <a:off x="10858500" y="828446"/>
+            <a:ext cx="114300" cy="114300"/>
+          </a:xfrm>
+          <a:prstGeom prst="ellipse">
+            <a:avLst/>
+          </a:prstGeom>
+          <a:solidFill>
+            <a:srgbClr val="0078D4"/>
+          </a:solidFill>
+          <a:ln w="12700">
+            <a:solidFill>
+              <a:srgbClr val="FFFFFF">
+                <a:alpha val="0"/>
+              </a:srgbClr>
+            </a:solidFill>
+            <a:prstDash val="solid"/>
+          </a:ln>
+        </p:spPr>
+        <p:txBody>
+          <a:bodyPr/>
+          <a:lstStyle/>
+          <a:p>
+            <a:endParaRPr lang="ja-JP" altLang="en-US"/>
+          </a:p>
+        </p:txBody>
+      </p:sp>
+      <p:sp>
+        <p:nvSpPr>
+          <p:cNvPr id="9" name="Text 7"/>
+          <p:cNvSpPr txBox="1"/>
+          <p:nvPr/>
+        </p:nvSpPr>
+        <p:spPr>
+          <a:xfrm>
+            <a:off x="11048695" y="752551"/>
+            <a:ext cx="771754" cy="267005"/>
+          </a:xfrm>
+          <a:prstGeom prst="rect">
+            <a:avLst/>
+          </a:prstGeom>
+          <a:noFill/>
+          <a:ln/>
+        </p:spPr>
+        <p:txBody>
+          <a:bodyPr wrap="square" lIns="0" tIns="0" rIns="0" bIns="0" rtlCol="0" anchor="ctr"/>
+          <a:lstStyle/>
+          <a:p>
+            <a:pPr marL="0" indent="0" algn="l">
+              <a:buNone/>
+            </a:pPr>
+            <a:r>
+              <a:rPr lang="en-US" sz="1600" dirty="0">
+                <a:solidFill>
+                  <a:srgbClr val="9CA3AF"/>
+                </a:solidFill>
+                <a:latin typeface="ui-monospace" pitchFamily="34" charset="0"/>
+                <a:ea typeface="ui-monospace" pitchFamily="34" charset="-122"/>
+                <a:cs typeface="ui-monospace" pitchFamily="34" charset="-120"/>
+              </a:rPr>
+              <a:t>Concept</a:t>
+            </a:r>
+            <a:endParaRPr lang="en-US" sz="1500" dirty="0"/>
+          </a:p>
+        </p:txBody>
+      </p:sp>
+      <p:sp>
+        <p:nvSpPr>
+          <p:cNvPr id="13" name="Shape 9"/>
+          <p:cNvSpPr/>
+          <p:nvPr/>
+        </p:nvSpPr>
+        <p:spPr>
+          <a:xfrm>
+            <a:off x="-1" y="1501341"/>
+            <a:ext cx="12191695" cy="4914900"/>
+          </a:xfrm>
+          <a:prstGeom prst="rect">
+            <a:avLst/>
+          </a:prstGeom>
+          <a:solidFill>
+            <a:srgbClr val="F9FAFB"/>
+          </a:solidFill>
+          <a:ln w="12700">
+            <a:solidFill>
+              <a:srgbClr val="FFFFFF">
+                <a:alpha val="0"/>
+              </a:srgbClr>
+            </a:solidFill>
+            <a:prstDash val="solid"/>
+          </a:ln>
+        </p:spPr>
+        <p:txBody>
+          <a:bodyPr/>
+          <a:lstStyle/>
+          <a:p>
+            <a:endParaRPr lang="ja-JP" altLang="en-US"/>
+          </a:p>
+        </p:txBody>
+      </p:sp>
+      <p:pic>
+        <p:nvPicPr>
+          <p:cNvPr id="23" name="Image 8" descr="preencoded.png"/>
+          <p:cNvPicPr>
+            <a:picLocks noChangeAspect="1"/>
+          </p:cNvPicPr>
+          <p:nvPr/>
+        </p:nvPicPr>
+        <p:blipFill>
+          <a:blip/>
+          <a:srcRect t="-401" b="-401"/>
+          <a:stretch/>
+        </p:blipFill>
+        <p:spPr>
+          <a:xfrm>
+            <a:off x="0" y="6801307"/>
+            <a:ext cx="12191695" cy="57607"/>
+          </a:xfrm>
+          <a:prstGeom prst="rect">
+            <a:avLst/>
+          </a:prstGeom>
+        </p:spPr>
+      </p:pic>
+      <p:sp>
+        <p:nvSpPr>
+          <p:cNvPr id="39" name="Shape 22"/>
+          <p:cNvSpPr/>
+          <p:nvPr/>
+        </p:nvSpPr>
+        <p:spPr>
+          <a:xfrm>
+            <a:off x="0" y="6400800"/>
+            <a:ext cx="12191695" cy="457200"/>
+          </a:xfrm>
+          <a:prstGeom prst="rect">
+            <a:avLst/>
+          </a:prstGeom>
+          <a:solidFill>
+            <a:srgbClr val="FFFFFF"/>
+          </a:solidFill>
+          <a:ln/>
+        </p:spPr>
+        <p:txBody>
+          <a:bodyPr/>
+          <a:lstStyle/>
+          <a:p>
+            <a:endParaRPr lang="ja-JP" altLang="en-US"/>
+          </a:p>
+        </p:txBody>
+      </p:sp>
+      <p:sp>
+        <p:nvSpPr>
+          <p:cNvPr id="40" name="Shape 23"/>
+          <p:cNvSpPr/>
+          <p:nvPr/>
+        </p:nvSpPr>
+        <p:spPr>
+          <a:xfrm>
+            <a:off x="0" y="6400800"/>
+            <a:ext cx="12191695" cy="9144"/>
+          </a:xfrm>
+          <a:prstGeom prst="rect">
+            <a:avLst/>
+          </a:prstGeom>
+          <a:solidFill>
+            <a:srgbClr val="E5E7EB"/>
+          </a:solidFill>
+          <a:ln w="12700">
+            <a:solidFill>
+              <a:srgbClr val="E5E7EB">
+                <a:alpha val="0"/>
+              </a:srgbClr>
+            </a:solidFill>
+            <a:prstDash val="solid"/>
+          </a:ln>
+        </p:spPr>
+        <p:txBody>
+          <a:bodyPr/>
+          <a:lstStyle/>
+          <a:p>
+            <a:endParaRPr lang="ja-JP" altLang="en-US"/>
+          </a:p>
+        </p:txBody>
+      </p:sp>
+      <p:sp>
+        <p:nvSpPr>
+          <p:cNvPr id="41" name="Text 24"/>
+          <p:cNvSpPr txBox="1"/>
+          <p:nvPr/>
+        </p:nvSpPr>
+        <p:spPr>
+          <a:xfrm>
+            <a:off x="457200" y="6519672"/>
+            <a:ext cx="2573122" cy="228600"/>
+          </a:xfrm>
+          <a:prstGeom prst="rect">
+            <a:avLst/>
+          </a:prstGeom>
+          <a:noFill/>
+          <a:ln/>
+        </p:spPr>
+        <p:txBody>
+          <a:bodyPr wrap="square" lIns="0" tIns="0" rIns="0" bIns="0" rtlCol="0" anchor="ctr"/>
+          <a:lstStyle/>
+          <a:p>
+            <a:pPr marL="0" indent="0" algn="l">
+              <a:buNone/>
+            </a:pPr>
+            <a:r>
+              <a:rPr lang="en-US" sz="1600" dirty="0">
+                <a:solidFill>
+                  <a:srgbClr val="9CA3AF"/>
+                </a:solidFill>
+                <a:latin typeface="Noto Sans JP" pitchFamily="34" charset="0"/>
+                <a:ea typeface="Noto Sans JP" pitchFamily="34" charset="-122"/>
+                <a:cs typeface="Noto Sans JP" pitchFamily="34" charset="-120"/>
+              </a:rPr>
+              <a:t>Power Automate for Beginners</a:t>
+            </a:r>
+            <a:endParaRPr lang="en-US" sz="1200" dirty="0"/>
+          </a:p>
+        </p:txBody>
+      </p:sp>
+      <p:sp>
+        <p:nvSpPr>
+          <p:cNvPr id="42" name="Text 25"/>
+          <p:cNvSpPr txBox="1"/>
+          <p:nvPr/>
+        </p:nvSpPr>
+        <p:spPr>
+          <a:xfrm>
+            <a:off x="10490911" y="6519672"/>
+            <a:ext cx="1484986" cy="228600"/>
+          </a:xfrm>
+          <a:prstGeom prst="rect">
+            <a:avLst/>
+          </a:prstGeom>
+          <a:noFill/>
+          <a:ln/>
+        </p:spPr>
+        <p:txBody>
+          <a:bodyPr wrap="square" lIns="0" tIns="0" rIns="0" bIns="0" rtlCol="0" anchor="ctr"/>
+          <a:lstStyle/>
+          <a:p>
+            <a:pPr marL="0" indent="0" algn="l">
+              <a:buNone/>
+            </a:pPr>
+            <a:r>
+              <a:rPr lang="en-US" sz="1600" dirty="0">
+                <a:solidFill>
+                  <a:srgbClr val="9CA3AF"/>
+                </a:solidFill>
+                <a:latin typeface="Noto Sans JP" pitchFamily="34" charset="0"/>
+                <a:ea typeface="Noto Sans JP" pitchFamily="34" charset="-122"/>
+                <a:cs typeface="Noto Sans JP" pitchFamily="34" charset="-120"/>
+              </a:rPr>
+              <a:t>Copyright © PA45</a:t>
+            </a:r>
+            <a:endParaRPr lang="en-US" sz="1200" dirty="0"/>
+          </a:p>
+        </p:txBody>
+      </p:sp>
+      <p:grpSp>
+        <p:nvGrpSpPr>
+          <p:cNvPr id="47" name="グループ化 46">
+            <a:extLst>
+              <a:ext uri="{FF2B5EF4-FFF2-40B4-BE49-F238E27FC236}">
+                <a16:creationId xmlns:a16="http://schemas.microsoft.com/office/drawing/2014/main" id="{722FBEAE-8CB7-7493-F595-CD1F2E21BD05}"/>
+              </a:ext>
+            </a:extLst>
+          </p:cNvPr>
+          <p:cNvGrpSpPr/>
+          <p:nvPr/>
+        </p:nvGrpSpPr>
+        <p:grpSpPr>
+          <a:xfrm>
+            <a:off x="4814990" y="6322778"/>
+            <a:ext cx="7139243" cy="405006"/>
+            <a:chOff x="6034969" y="604238"/>
+            <a:chExt cx="5862289" cy="405006"/>
+          </a:xfrm>
+        </p:grpSpPr>
+        <p:sp>
+          <p:nvSpPr>
+            <p:cNvPr id="48" name="Shape 31">
+              <a:extLst>
+                <a:ext uri="{FF2B5EF4-FFF2-40B4-BE49-F238E27FC236}">
+                  <a16:creationId xmlns:a16="http://schemas.microsoft.com/office/drawing/2014/main" id="{DD44BB3C-F859-7A5E-7E34-CC1C35ECEA4D}"/>
+                </a:ext>
+              </a:extLst>
+            </p:cNvPr>
+            <p:cNvSpPr/>
+            <p:nvPr/>
+          </p:nvSpPr>
+          <p:spPr>
+            <a:xfrm>
+              <a:off x="6034969" y="604238"/>
+              <a:ext cx="5854549" cy="386057"/>
+            </a:xfrm>
+            <a:prstGeom prst="roundRect">
+              <a:avLst>
+                <a:gd name="adj" fmla="val 342465"/>
+              </a:avLst>
+            </a:prstGeom>
+            <a:solidFill>
+              <a:srgbClr val="EFF6FF"/>
+            </a:solidFill>
+            <a:ln w="12700">
+              <a:solidFill>
+                <a:srgbClr val="FFFFFF">
+                  <a:alpha val="0"/>
+                </a:srgbClr>
+              </a:solidFill>
+              <a:prstDash val="solid"/>
+            </a:ln>
+          </p:spPr>
+          <p:txBody>
+            <a:bodyPr/>
+            <a:lstStyle/>
+            <a:p>
+              <a:endParaRPr lang="ja-JP" altLang="en-US"/>
+            </a:p>
+          </p:txBody>
+        </p:sp>
+        <p:sp>
+          <p:nvSpPr>
+            <p:cNvPr id="49" name="Text 21">
+              <a:extLst>
+                <a:ext uri="{FF2B5EF4-FFF2-40B4-BE49-F238E27FC236}">
+                  <a16:creationId xmlns:a16="http://schemas.microsoft.com/office/drawing/2014/main" id="{A7F44BB1-1667-BB85-557B-D7C1AAD8A0FA}"/>
+                </a:ext>
+              </a:extLst>
+            </p:cNvPr>
+            <p:cNvSpPr txBox="1"/>
+            <p:nvPr/>
+          </p:nvSpPr>
+          <p:spPr>
+            <a:xfrm>
+              <a:off x="6287649" y="612651"/>
+              <a:ext cx="5609609" cy="396593"/>
+            </a:xfrm>
+            <a:prstGeom prst="rect">
+              <a:avLst/>
+            </a:prstGeom>
+            <a:noFill/>
+            <a:ln/>
+          </p:spPr>
+          <p:txBody>
+            <a:bodyPr wrap="square" lIns="0" tIns="0" rIns="0" bIns="0" rtlCol="0" anchor="ctr"/>
+            <a:lstStyle/>
+            <a:p>
+              <a:pPr marL="0" indent="0" algn="l">
+                <a:buNone/>
+              </a:pPr>
+              <a:r>
+                <a:rPr lang="en-US" sz="1400" b="1" dirty="0">
+                  <a:solidFill>
+                    <a:srgbClr val="2563EB"/>
+                  </a:solidFill>
+                  <a:latin typeface="Noto Sans JP" pitchFamily="34" charset="0"/>
+                  <a:ea typeface="Noto Sans JP" pitchFamily="34" charset="-122"/>
+                  <a:cs typeface="Noto Sans JP" pitchFamily="34" charset="-120"/>
+                </a:rPr>
+                <a:t>学んだこと・気づいたことを #</a:t>
+              </a:r>
+              <a:r>
+                <a:rPr lang="en-US" sz="1400" b="1">
+                  <a:solidFill>
+                    <a:srgbClr val="2563EB"/>
+                  </a:solidFill>
+                  <a:latin typeface="Noto Sans JP" pitchFamily="34" charset="0"/>
+                  <a:ea typeface="Noto Sans JP" pitchFamily="34" charset="-122"/>
+                  <a:cs typeface="Noto Sans JP" pitchFamily="34" charset="-120"/>
+                </a:rPr>
+                <a:t>PA45 で</a:t>
+              </a:r>
+              <a:r>
+                <a:rPr lang="ja-JP" altLang="en-US" sz="1400" b="1">
+                  <a:solidFill>
+                    <a:srgbClr val="2563EB"/>
+                  </a:solidFill>
+                  <a:latin typeface="Noto Sans JP" pitchFamily="34" charset="0"/>
+                  <a:ea typeface="Noto Sans JP" pitchFamily="34" charset="-122"/>
+                  <a:cs typeface="Noto Sans JP" pitchFamily="34" charset="-120"/>
+                </a:rPr>
+                <a:t>リアルタイムに</a:t>
+              </a:r>
+              <a:r>
+                <a:rPr lang="en-US" sz="1400" b="1">
+                  <a:solidFill>
+                    <a:srgbClr val="2563EB"/>
+                  </a:solidFill>
+                  <a:latin typeface="Noto Sans JP" pitchFamily="34" charset="0"/>
+                  <a:ea typeface="Noto Sans JP" pitchFamily="34" charset="-122"/>
+                  <a:cs typeface="Noto Sans JP" pitchFamily="34" charset="-120"/>
+                </a:rPr>
+                <a:t>投稿しよう！</a:t>
+              </a:r>
+              <a:r>
+                <a:rPr lang="ja-JP" altLang="en-US" sz="1400" b="1">
+                  <a:solidFill>
+                    <a:srgbClr val="2563EB"/>
+                  </a:solidFill>
+                  <a:latin typeface="Noto Sans JP" pitchFamily="34" charset="0"/>
+                  <a:ea typeface="Noto Sans JP" pitchFamily="34" charset="-122"/>
+                  <a:cs typeface="Noto Sans JP" pitchFamily="34" charset="-120"/>
+                </a:rPr>
+                <a:t>スクショ</a:t>
+              </a:r>
+              <a:r>
+                <a:rPr lang="en-US" altLang="ja-JP" sz="1400" b="1">
+                  <a:solidFill>
+                    <a:srgbClr val="2563EB"/>
+                  </a:solidFill>
+                  <a:latin typeface="Noto Sans JP" pitchFamily="34" charset="0"/>
+                  <a:ea typeface="Noto Sans JP" pitchFamily="34" charset="-122"/>
+                  <a:cs typeface="Noto Sans JP" pitchFamily="34" charset="-120"/>
+                </a:rPr>
+                <a:t>OK</a:t>
+              </a:r>
+              <a:r>
+                <a:rPr lang="ja-JP" altLang="en-US" sz="1400" b="1">
+                  <a:solidFill>
+                    <a:srgbClr val="2563EB"/>
+                  </a:solidFill>
+                  <a:latin typeface="Noto Sans JP" pitchFamily="34" charset="0"/>
+                  <a:ea typeface="Noto Sans JP" pitchFamily="34" charset="-122"/>
+                  <a:cs typeface="Noto Sans JP" pitchFamily="34" charset="-120"/>
+                </a:rPr>
+                <a:t>！</a:t>
+              </a:r>
+              <a:endParaRPr lang="en-US" sz="1400" dirty="0"/>
+            </a:p>
+          </p:txBody>
+        </p:sp>
+      </p:grpSp>
+      <p:sp>
+        <p:nvSpPr>
+          <p:cNvPr id="10" name="Text 5">
+            <a:extLst>
+              <a:ext uri="{FF2B5EF4-FFF2-40B4-BE49-F238E27FC236}">
+                <a16:creationId xmlns:a16="http://schemas.microsoft.com/office/drawing/2014/main" id="{0DA7D246-5DFE-385C-DC4F-E8A338DB3505}"/>
+              </a:ext>
+            </a:extLst>
+          </p:cNvPr>
+          <p:cNvSpPr txBox="1"/>
+          <p:nvPr/>
+        </p:nvSpPr>
+        <p:spPr>
+          <a:xfrm>
+            <a:off x="3030322" y="3331497"/>
+            <a:ext cx="8169837" cy="810410"/>
+          </a:xfrm>
+          <a:prstGeom prst="rect">
+            <a:avLst/>
+          </a:prstGeom>
+          <a:noFill/>
+          <a:ln/>
+        </p:spPr>
+        <p:txBody>
+          <a:bodyPr wrap="square" lIns="0" tIns="0" rIns="0" bIns="0" rtlCol="0" anchor="ctr"/>
+          <a:lstStyle/>
+          <a:p>
+            <a:pPr marL="0" indent="0" algn="l">
+              <a:buNone/>
+            </a:pPr>
+            <a:r>
+              <a:rPr lang="ja-JP" altLang="en-US" sz="4400" b="1">
+                <a:solidFill>
+                  <a:srgbClr val="6B7280"/>
+                </a:solidFill>
+                <a:latin typeface="Noto Sans JP" pitchFamily="34" charset="0"/>
+                <a:ea typeface="Noto Sans JP" pitchFamily="34" charset="-122"/>
+              </a:rPr>
+              <a:t>ハンズオン行きましょう。</a:t>
+            </a:r>
+            <a:endParaRPr lang="en-US" sz="7200" dirty="0"/>
+          </a:p>
+        </p:txBody>
+      </p:sp>
+    </p:spTree>
+    <p:extLst>
+      <p:ext uri="{BB962C8B-B14F-4D97-AF65-F5344CB8AC3E}">
+        <p14:creationId xmlns:p14="http://schemas.microsoft.com/office/powerpoint/2010/main" val="1541831861"/>
+      </p:ext>
+    </p:extLst>
+  </p:cSld>
+  <p:clrMapOvr>
+    <a:masterClrMapping/>
+  </p:clrMapOvr>
+</p:sld>
+</file>
+
+<file path=ppt/slides/slide11.xml><?xml version="1.0" encoding="utf-8"?>
+<p:sld xmlns:a="http://schemas.openxmlformats.org/drawingml/2006/main" xmlns:r="http://schemas.openxmlformats.org/officeDocument/2006/relationships" xmlns:p="http://schemas.openxmlformats.org/presentationml/2006/main">
+  <p:cSld>
+    <p:spTree>
+      <p:nvGrpSpPr>
+        <p:cNvPr id="1" name=""/>
+        <p:cNvGrpSpPr/>
+        <p:nvPr/>
+      </p:nvGrpSpPr>
+      <p:grpSpPr>
+        <a:xfrm>
+          <a:off x="0" y="0"/>
+          <a:ext cx="0" cy="0"/>
+          <a:chOff x="0" y="0"/>
+          <a:chExt cx="0" cy="0"/>
+        </a:xfrm>
+      </p:grpSpPr>
+      <p:sp>
+        <p:nvSpPr>
+          <p:cNvPr id="2" name="Shape 0"/>
+          <p:cNvSpPr/>
+          <p:nvPr/>
+        </p:nvSpPr>
+        <p:spPr>
+          <a:xfrm>
+            <a:off x="0" y="0"/>
+            <a:ext cx="12191695" cy="6858000"/>
+          </a:xfrm>
+          <a:prstGeom prst="rect">
+            <a:avLst/>
+          </a:prstGeom>
+          <a:solidFill>
+            <a:srgbClr val="F0F0F0"/>
+          </a:solidFill>
+          <a:ln w="12700">
+            <a:solidFill>
+              <a:srgbClr val="FFFFFF">
+                <a:alpha val="0"/>
+              </a:srgbClr>
+            </a:solidFill>
+            <a:prstDash val="solid"/>
+          </a:ln>
+        </p:spPr>
+        <p:txBody>
+          <a:bodyPr/>
+          <a:lstStyle/>
+          <a:p>
+            <a:endParaRPr lang="ja-JP" altLang="en-US"/>
+          </a:p>
+        </p:txBody>
+      </p:sp>
+      <p:sp>
+        <p:nvSpPr>
+          <p:cNvPr id="3" name="Shape 1"/>
+          <p:cNvSpPr/>
+          <p:nvPr/>
+        </p:nvSpPr>
+        <p:spPr>
+          <a:xfrm>
+            <a:off x="0" y="0"/>
+            <a:ext cx="12191695" cy="6858000"/>
+          </a:xfrm>
+          <a:prstGeom prst="rect">
+            <a:avLst/>
+          </a:prstGeom>
+          <a:solidFill>
+            <a:srgbClr val="FFFFFF"/>
+          </a:solidFill>
+          <a:ln w="12700">
+            <a:solidFill>
+              <a:srgbClr val="FFFFFF">
+                <a:alpha val="0"/>
+              </a:srgbClr>
+            </a:solidFill>
+            <a:prstDash val="solid"/>
+          </a:ln>
         </p:spPr>
         <p:txBody>
           <a:bodyPr/>
@@ -3350,7 +4042,7 @@
 </p:sld>
 </file>
 
-<file path=ppt/slides/slide11.xml><?xml version="1.0" encoding="utf-8"?>
+<file path=ppt/slides/slide12.xml><?xml version="1.0" encoding="utf-8"?>
 <p:sld xmlns:a="http://schemas.openxmlformats.org/drawingml/2006/main" xmlns:r="http://schemas.openxmlformats.org/officeDocument/2006/relationships" xmlns:p="http://schemas.openxmlformats.org/presentationml/2006/main">
   <p:cSld name="Slide 13">
     <p:spTree>
@@ -5284,7 +5976,7 @@
 </p:sld>
 </file>
 
-<file path=ppt/slides/slide12.xml><?xml version="1.0" encoding="utf-8"?>
+<file path=ppt/slides/slide13.xml><?xml version="1.0" encoding="utf-8"?>
 <p:sld xmlns:a="http://schemas.openxmlformats.org/drawingml/2006/main" xmlns:r="http://schemas.openxmlformats.org/officeDocument/2006/relationships" xmlns:p="http://schemas.openxmlformats.org/presentationml/2006/main">
   <p:cSld>
     <p:spTree>
@@ -6592,8 +7284,8 @@
 </p:sld>
 </file>
 
-<file path=ppt/slides/slide13.xml><?xml version="1.0" encoding="utf-8"?>
-<p:sld xmlns:a="http://schemas.openxmlformats.org/drawingml/2006/main" xmlns:p="http://schemas.openxmlformats.org/presentationml/2006/main" xmlns:r="http://schemas.openxmlformats.org/officeDocument/2006/relationships">
+<file path=ppt/slides/slide2.xml><?xml version="1.0" encoding="utf-8"?>
+<p:sld xmlns:a="http://schemas.openxmlformats.org/drawingml/2006/main" xmlns:r="http://schemas.openxmlformats.org/officeDocument/2006/relationships" xmlns:p="http://schemas.openxmlformats.org/presentationml/2006/main">
   <p:cSld>
     <p:bg>
       <p:bgPr>
@@ -6609,7 +7301,14 @@
         <p:cNvGrpSpPr/>
         <p:nvPr/>
       </p:nvGrpSpPr>
-      <p:grpSpPr/>
+      <p:grpSpPr>
+        <a:xfrm>
+          <a:off x="0" y="0"/>
+          <a:ext cx="0" cy="0"/>
+          <a:chOff x="0" y="0"/>
+          <a:chExt cx="0" cy="0"/>
+        </a:xfrm>
+      </p:grpSpPr>
       <p:sp>
         <p:nvSpPr>
           <p:cNvPr id="2" name="Rectangle 1"/>
@@ -6646,7 +7345,7 @@
           </a:fontRef>
         </p:style>
         <p:txBody>
-          <a:bodyPr rtlCol="0" anchor="ctr" lIns="548640" tIns="228600"/>
+          <a:bodyPr lIns="548640" tIns="228600" rtlCol="0" anchor="ctr"/>
           <a:lstStyle/>
           <a:p>
             <a:pPr algn="ctr"/>
@@ -6656,7 +7355,7 @@
                   <a:srgbClr val="FFFFFF"/>
                 </a:solidFill>
               </a:rPr>
-              <a:t>🛠️ ハンズオン 事前準備のお願い（3分でできます）</a:t>
+              <a:t>ハンズオン 事前準備のお願い（3分でできます）</a:t>
             </a:r>
           </a:p>
         </p:txBody>
@@ -6670,7 +7369,7 @@
         <p:spPr>
           <a:xfrm>
             <a:off x="548640" y="1371600"/>
-            <a:ext cx="11094720" cy="548640"/>
+            <a:ext cx="9660017" cy="338554"/>
           </a:xfrm>
           <a:prstGeom prst="rect">
             <a:avLst/>
@@ -6684,10 +7383,12 @@
           <a:lstStyle/>
           <a:p>
             <a:r>
-              <a:rPr sz="1600">
+              <a:rPr sz="1600" b="1">
                 <a:solidFill>
                   <a:srgbClr val="333333"/>
                 </a:solidFill>
+                <a:latin typeface="+mj-ea"/>
+                <a:ea typeface="+mj-ea"/>
               </a:rPr>
               <a:t>当日のハンズオンで使う「承認用サンプルExcel」を、事前にご自身のSharePointに配置してください</a:t>
             </a:r>
@@ -6732,7 +7433,7 @@
           </a:fontRef>
         </p:style>
         <p:txBody>
-          <a:bodyPr rtlCol="0" anchor="ctr" lIns="274320" tIns="182880" wrap="square"/>
+          <a:bodyPr wrap="square" lIns="274320" tIns="182880" rtlCol="0" anchor="ctr"/>
           <a:lstStyle/>
           <a:p>
             <a:pPr algn="ctr"/>
@@ -6741,6 +7442,8 @@
                 <a:solidFill>
                   <a:srgbClr val="2A7DD4"/>
                 </a:solidFill>
+                <a:latin typeface="+mj-ea"/>
+                <a:ea typeface="+mj-ea"/>
               </a:rPr>
               <a:t>STEP 1   サンプルExcelをダウンロード</a:t>
             </a:r>
@@ -6752,10 +7455,12 @@
               </a:spcBef>
             </a:pPr>
             <a:r>
-              <a:rPr sz="1300">
+              <a:rPr sz="1300" b="1">
                 <a:solidFill>
                   <a:srgbClr val="555555"/>
                 </a:solidFill>
+                <a:latin typeface="+mj-ea"/>
+                <a:ea typeface="+mj-ea"/>
               </a:rPr>
               <a:t>👇 下のURLをブラウザに貼り付けてください</a:t>
             </a:r>
@@ -6771,6 +7476,8 @@
                 <a:solidFill>
                   <a:srgbClr val="1A6BBF"/>
                 </a:solidFill>
+                <a:latin typeface="+mj-ea"/>
+                <a:ea typeface="+mj-ea"/>
               </a:rPr>
               <a:t>https://haru-powerplatform.github.io/pa45/flows/vol-09/approval-sample.xlsx</a:t>
             </a:r>
@@ -6815,7 +7522,7 @@
           </a:fontRef>
         </p:style>
         <p:txBody>
-          <a:bodyPr rtlCol="0" anchor="ctr" lIns="274320" tIns="182880" wrap="square"/>
+          <a:bodyPr wrap="square" lIns="274320" tIns="182880" rtlCol="0" anchor="ctr"/>
           <a:lstStyle/>
           <a:p>
             <a:pPr algn="ctr"/>
@@ -6824,6 +7531,8 @@
                 <a:solidFill>
                   <a:srgbClr val="2A7DD4"/>
                 </a:solidFill>
+                <a:latin typeface="+mj-ea"/>
+                <a:ea typeface="+mj-ea"/>
               </a:rPr>
               <a:t>STEP 2   ご自身のSharePointにアップロード</a:t>
             </a:r>
@@ -6835,10 +7544,12 @@
               </a:spcBef>
             </a:pPr>
             <a:r>
-              <a:rPr sz="1400">
+              <a:rPr sz="1400" b="1">
                 <a:solidFill>
                   <a:srgbClr val="333333"/>
                 </a:solidFill>
+                <a:latin typeface="+mj-ea"/>
+                <a:ea typeface="+mj-ea"/>
               </a:rPr>
               <a:t>①  編集権限のあるSharePointサイトを開く（社内サイト・チームサイト等）</a:t>
             </a:r>
@@ -6850,10 +7561,12 @@
               </a:spcBef>
             </a:pPr>
             <a:r>
-              <a:rPr sz="1400">
+              <a:rPr sz="1400" b="1">
                 <a:solidFill>
                   <a:srgbClr val="333333"/>
                 </a:solidFill>
+                <a:latin typeface="+mj-ea"/>
+                <a:ea typeface="+mj-ea"/>
               </a:rPr>
               <a:t>②  「ドキュメント」ライブラリを開く</a:t>
             </a:r>
@@ -6865,10 +7578,12 @@
               </a:spcBef>
             </a:pPr>
             <a:r>
-              <a:rPr sz="1400">
+              <a:rPr sz="1400" b="1">
                 <a:solidFill>
                   <a:srgbClr val="333333"/>
                 </a:solidFill>
+                <a:latin typeface="+mj-ea"/>
+                <a:ea typeface="+mj-ea"/>
               </a:rPr>
               <a:t>③  「アップロード → ファイル」で approval-sample.xlsx を選択</a:t>
             </a:r>
@@ -6880,10 +7595,12 @@
               </a:spcBef>
             </a:pPr>
             <a:r>
-              <a:rPr sz="1400">
+              <a:rPr sz="1400" b="1">
                 <a:solidFill>
                   <a:srgbClr val="333333"/>
                 </a:solidFill>
+                <a:latin typeface="+mj-ea"/>
+                <a:ea typeface="+mj-ea"/>
               </a:rPr>
               <a:t>④  完了！  当日はこのファイルを上司役で更新する想定でフローを作ります</a:t>
             </a:r>
@@ -6899,7 +7616,7 @@
         <p:spPr>
           <a:xfrm>
             <a:off x="548640" y="6035040"/>
-            <a:ext cx="11094720" cy="457200"/>
+            <a:ext cx="7957628" cy="369332"/>
           </a:xfrm>
           <a:prstGeom prst="rect">
             <a:avLst/>
@@ -6913,7 +7630,7 @@
           <a:lstStyle/>
           <a:p>
             <a:r>
-              <a:rPr sz="1200" i="1">
+              <a:rPr b="1">
                 <a:solidFill>
                   <a:srgbClr val="888888"/>
                 </a:solidFill>
@@ -6931,7 +7648,7 @@
 </p:sld>
 </file>
 
-<file path=ppt/slides/slide2.xml><?xml version="1.0" encoding="utf-8"?>
+<file path=ppt/slides/slide3.xml><?xml version="1.0" encoding="utf-8"?>
 <p:sld xmlns:a="http://schemas.openxmlformats.org/drawingml/2006/main" xmlns:r="http://schemas.openxmlformats.org/officeDocument/2006/relationships" xmlns:p="http://schemas.openxmlformats.org/presentationml/2006/main">
   <p:cSld name="Slide 4">
     <p:spTree>
@@ -8139,7 +8856,7 @@
 </p:sld>
 </file>
 
-<file path=ppt/slides/slide3.xml><?xml version="1.0" encoding="utf-8"?>
+<file path=ppt/slides/slide4.xml><?xml version="1.0" encoding="utf-8"?>
 <p:sld xmlns:a="http://schemas.openxmlformats.org/drawingml/2006/main" xmlns:r="http://schemas.openxmlformats.org/officeDocument/2006/relationships" xmlns:p="http://schemas.openxmlformats.org/presentationml/2006/main">
   <p:cSld name="Slide 2">
     <p:spTree>
@@ -9712,7 +10429,7 @@
 </p:sld>
 </file>
 
-<file path=ppt/slides/slide4.xml><?xml version="1.0" encoding="utf-8"?>
+<file path=ppt/slides/slide5.xml><?xml version="1.0" encoding="utf-8"?>
 <p:sld xmlns:a="http://schemas.openxmlformats.org/drawingml/2006/main" xmlns:r="http://schemas.openxmlformats.org/officeDocument/2006/relationships" xmlns:p="http://schemas.openxmlformats.org/presentationml/2006/main">
   <p:cSld name="Slide 1">
     <p:spTree>
@@ -12135,7 +12852,7 @@
 </p:sld>
 </file>
 
-<file path=ppt/slides/slide5.xml><?xml version="1.0" encoding="utf-8"?>
+<file path=ppt/slides/slide6.xml><?xml version="1.0" encoding="utf-8"?>
 <p:sld xmlns:a="http://schemas.openxmlformats.org/drawingml/2006/main" xmlns:r="http://schemas.openxmlformats.org/officeDocument/2006/relationships" xmlns:p="http://schemas.openxmlformats.org/presentationml/2006/main">
   <p:cSld>
     <p:spTree>
@@ -14089,7 +14806,7 @@
 </p:sld>
 </file>
 
-<file path=ppt/slides/slide6.xml><?xml version="1.0" encoding="utf-8"?>
+<file path=ppt/slides/slide7.xml><?xml version="1.0" encoding="utf-8"?>
 <p:sld xmlns:a="http://schemas.openxmlformats.org/drawingml/2006/main" xmlns:r="http://schemas.openxmlformats.org/officeDocument/2006/relationships" xmlns:p="http://schemas.openxmlformats.org/presentationml/2006/main">
   <p:cSld name="Slide 6">
     <p:spTree>
@@ -15682,7 +16399,7 @@
 </p:sld>
 </file>
 
-<file path=ppt/slides/slide7.xml><?xml version="1.0" encoding="utf-8"?>
+<file path=ppt/slides/slide8.xml><?xml version="1.0" encoding="utf-8"?>
 <p:sld xmlns:a="http://schemas.openxmlformats.org/drawingml/2006/main" xmlns:r="http://schemas.openxmlformats.org/officeDocument/2006/relationships" xmlns:p="http://schemas.openxmlformats.org/presentationml/2006/main">
   <p:cSld name="Slide 6">
     <p:spTree>
@@ -16398,125 +17115,6 @@
       </p:grpSp>
       <p:sp>
         <p:nvSpPr>
-          <p:cNvPr id="44" name="フリーフォーム: 図形 43">
-            <a:extLst>
-              <a:ext uri="{FF2B5EF4-FFF2-40B4-BE49-F238E27FC236}">
-                <a16:creationId xmlns:a16="http://schemas.microsoft.com/office/drawing/2014/main" id="{F9B91B76-7920-EE96-CB51-D8B32827C982}"/>
-              </a:ext>
-            </a:extLst>
-          </p:cNvPr>
-          <p:cNvSpPr/>
-          <p:nvPr/>
-        </p:nvSpPr>
-        <p:spPr>
-          <a:xfrm>
-            <a:off x="6002970" y="1626079"/>
-            <a:ext cx="3973286" cy="4104162"/>
-          </a:xfrm>
-          <a:custGeom>
-            <a:avLst/>
-            <a:gdLst>
-              <a:gd name="csX0" fmla="*/ 0 w 3973286"/>
-              <a:gd name="csY0" fmla="*/ 4675414 h 4996543"/>
-              <a:gd name="csX1" fmla="*/ 0 w 3973286"/>
-              <a:gd name="csY1" fmla="*/ 4996543 h 4996543"/>
-              <a:gd name="csX2" fmla="*/ 1665515 w 3973286"/>
-              <a:gd name="csY2" fmla="*/ 4996543 h 4996543"/>
-              <a:gd name="csX3" fmla="*/ 1670957 w 3973286"/>
-              <a:gd name="csY3" fmla="*/ 4713514 h 4996543"/>
-              <a:gd name="csX4" fmla="*/ 1670957 w 3973286"/>
-              <a:gd name="csY4" fmla="*/ 0 h 4996543"/>
-              <a:gd name="csX5" fmla="*/ 3973286 w 3973286"/>
-              <a:gd name="csY5" fmla="*/ 0 h 4996543"/>
-              <a:gd name="csX6" fmla="*/ 3973286 w 3973286"/>
-              <a:gd name="csY6" fmla="*/ 854529 h 4996543"/>
-            </a:gdLst>
-            <a:ahLst/>
-            <a:cxnLst>
-              <a:cxn ang="0">
-                <a:pos x="csX0" y="csY0"/>
-              </a:cxn>
-              <a:cxn ang="0">
-                <a:pos x="csX1" y="csY1"/>
-              </a:cxn>
-              <a:cxn ang="0">
-                <a:pos x="csX2" y="csY2"/>
-              </a:cxn>
-              <a:cxn ang="0">
-                <a:pos x="csX3" y="csY3"/>
-              </a:cxn>
-              <a:cxn ang="0">
-                <a:pos x="csX4" y="csY4"/>
-              </a:cxn>
-              <a:cxn ang="0">
-                <a:pos x="csX5" y="csY5"/>
-              </a:cxn>
-              <a:cxn ang="0">
-                <a:pos x="csX6" y="csY6"/>
-              </a:cxn>
-            </a:cxnLst>
-            <a:rect l="l" t="t" r="r" b="b"/>
-            <a:pathLst>
-              <a:path w="3973286" h="4996543">
-                <a:moveTo>
-                  <a:pt x="0" y="4675414"/>
-                </a:moveTo>
-                <a:lnTo>
-                  <a:pt x="0" y="4996543"/>
-                </a:lnTo>
-                <a:lnTo>
-                  <a:pt x="1665515" y="4996543"/>
-                </a:lnTo>
-                <a:lnTo>
-                  <a:pt x="1670957" y="4713514"/>
-                </a:lnTo>
-                <a:lnTo>
-                  <a:pt x="1670957" y="0"/>
-                </a:lnTo>
-                <a:lnTo>
-                  <a:pt x="3973286" y="0"/>
-                </a:lnTo>
-                <a:lnTo>
-                  <a:pt x="3973286" y="854529"/>
-                </a:lnTo>
-              </a:path>
-            </a:pathLst>
-          </a:custGeom>
-          <a:noFill/>
-          <a:ln w="38100">
-            <a:solidFill>
-              <a:srgbClr val="C00000"/>
-            </a:solidFill>
-            <a:tailEnd type="arrow"/>
-          </a:ln>
-        </p:spPr>
-        <p:style>
-          <a:lnRef idx="2">
-            <a:schemeClr val="accent1">
-              <a:shade val="15000"/>
-            </a:schemeClr>
-          </a:lnRef>
-          <a:fillRef idx="1">
-            <a:schemeClr val="accent1"/>
-          </a:fillRef>
-          <a:effectRef idx="0">
-            <a:schemeClr val="accent1"/>
-          </a:effectRef>
-          <a:fontRef idx="minor">
-            <a:schemeClr val="lt1"/>
-          </a:fontRef>
-        </p:style>
-        <p:txBody>
-          <a:bodyPr rtlCol="0" anchor="ctr"/>
-          <a:lstStyle/>
-          <a:p>
-            <a:pPr algn="ctr"/>
-            <a:endParaRPr kumimoji="1" lang="ja-JP" altLang="en-US"/>
-          </a:p>
-        </p:txBody>
-      </p:sp>
-      <p:sp>
-        <p:nvSpPr>
           <p:cNvPr id="51" name="Text 5">
             <a:extLst>
               <a:ext uri="{FF2B5EF4-FFF2-40B4-BE49-F238E27FC236}">
@@ -16529,8 +17127,8 @@
         </p:nvSpPr>
         <p:spPr>
           <a:xfrm>
-            <a:off x="126433" y="1890979"/>
-            <a:ext cx="4780479" cy="3947047"/>
+            <a:off x="265580" y="2195490"/>
+            <a:ext cx="5598507" cy="3947047"/>
           </a:xfrm>
           <a:prstGeom prst="rect">
             <a:avLst/>
@@ -16742,6 +17340,44 @@
           </a:p>
         </p:txBody>
       </p:sp>
+      <p:pic>
+        <p:nvPicPr>
+          <p:cNvPr id="11" name="図 10" descr="The image shows a user interface with a form containing a file input, a checkbox for a property condition, and buttons for posting messages in chat or channel.&#10;&#10;AI 生成コンテンツは誤りを含む可能性があります。">
+            <a:extLst>
+              <a:ext uri="{FF2B5EF4-FFF2-40B4-BE49-F238E27FC236}">
+                <a16:creationId xmlns:a16="http://schemas.microsoft.com/office/drawing/2014/main" id="{A17FFD3D-1303-2BC7-3253-E2DBE5E19F07}"/>
+              </a:ext>
+            </a:extLst>
+          </p:cNvPr>
+          <p:cNvPicPr>
+            <a:picLocks noChangeAspect="1"/>
+          </p:cNvPicPr>
+          <p:nvPr/>
+        </p:nvPicPr>
+        <p:blipFill>
+          <a:blip r:embed="rId2"/>
+          <a:stretch>
+            <a:fillRect/>
+          </a:stretch>
+        </p:blipFill>
+        <p:spPr>
+          <a:xfrm>
+            <a:off x="6575704" y="1709443"/>
+            <a:ext cx="4904373" cy="4568713"/>
+          </a:xfrm>
+          <a:prstGeom prst="rect">
+            <a:avLst/>
+          </a:prstGeom>
+          <a:ln>
+            <a:solidFill>
+              <a:schemeClr val="tx1">
+                <a:lumMod val="65000"/>
+                <a:lumOff val="35000"/>
+              </a:schemeClr>
+            </a:solidFill>
+          </a:ln>
+        </p:spPr>
+      </p:pic>
     </p:spTree>
   </p:cSld>
   <p:clrMapOvr>
@@ -16750,7 +17386,7 @@
 </p:sld>
 </file>
 
-<file path=ppt/slides/slide8.xml><?xml version="1.0" encoding="utf-8"?>
+<file path=ppt/slides/slide9.xml><?xml version="1.0" encoding="utf-8"?>
 <p:sld xmlns:a="http://schemas.openxmlformats.org/drawingml/2006/main" xmlns:r="http://schemas.openxmlformats.org/officeDocument/2006/relationships" xmlns:p="http://schemas.openxmlformats.org/presentationml/2006/main">
   <p:cSld>
     <p:spTree>
@@ -17488,10 +18124,10 @@
       </p:grpSp>
       <p:pic>
         <p:nvPicPr>
-          <p:cNvPr id="15" name="図 14" descr="The image depicts a user interface with a dialogue box, showing steps for submitting a new response, obtaining detailed cost information, and awaiting approval from a supervisor.&#10;&#10;AI 生成コンテンツは誤りを含む可能性があります。">
+          <p:cNvPr id="11" name="図 10" descr="The image shows a user interface with a form containing a file input, a checkbox for a property condition, and buttons for posting messages in chat or channel.&#10;&#10;AI 生成コンテンツは誤りを含む可能性があります。">
             <a:extLst>
               <a:ext uri="{FF2B5EF4-FFF2-40B4-BE49-F238E27FC236}">
-                <a16:creationId xmlns:a16="http://schemas.microsoft.com/office/drawing/2014/main" id="{35AE861C-8197-5C83-2921-F09023E68B00}"/>
+                <a16:creationId xmlns:a16="http://schemas.microsoft.com/office/drawing/2014/main" id="{C4B7F1DA-A89A-AB3A-717D-D0519B8F704B}"/>
               </a:ext>
             </a:extLst>
           </p:cNvPr>
@@ -17508,22 +18144,20 @@
         </p:blipFill>
         <p:spPr>
           <a:xfrm>
-            <a:off x="699161" y="1877263"/>
-            <a:ext cx="2623902" cy="4097601"/>
+            <a:off x="218337" y="1644337"/>
+            <a:ext cx="4904373" cy="4568713"/>
           </a:xfrm>
           <a:prstGeom prst="rect">
             <a:avLst/>
           </a:prstGeom>
           <a:ln>
-            <a:noFill/>
+            <a:solidFill>
+              <a:schemeClr val="tx1">
+                <a:lumMod val="65000"/>
+                <a:lumOff val="35000"/>
+              </a:schemeClr>
+            </a:solidFill>
           </a:ln>
-          <a:effectLst>
-            <a:outerShdw blurRad="190500" algn="tl" rotWithShape="0">
-              <a:srgbClr val="000000">
-                <a:alpha val="70000"/>
-              </a:srgbClr>
-            </a:outerShdw>
-          </a:effectLst>
         </p:spPr>
       </p:pic>
       <p:sp>
@@ -17540,8 +18174,8 @@
         </p:nvSpPr>
         <p:spPr>
           <a:xfrm>
-            <a:off x="698856" y="4698504"/>
-            <a:ext cx="2623902" cy="1276360"/>
+            <a:off x="1501744" y="2869704"/>
+            <a:ext cx="2267368" cy="559296"/>
           </a:xfrm>
           <a:prstGeom prst="roundRect">
             <a:avLst/>
@@ -17581,10 +18215,10 @@
       </p:sp>
       <p:pic>
         <p:nvPicPr>
-          <p:cNvPr id="19" name="図 18" descr="The image is a Japanese language web page interface for submitting an expense request, with fields for approval request, title, user search, and details including request content, amount, and reason.&#10;&#10;AI 生成コンテンツは誤りを含む可能性があります。">
+          <p:cNvPr id="14" name="図 13" descr="The image displays a software interface with a condition expression field for setting parameters and choosing operators, followed by a sample Excel file for approval.&#10;&#10;AI 生成コンテンツは誤りを含む可能性があります。">
             <a:extLst>
               <a:ext uri="{FF2B5EF4-FFF2-40B4-BE49-F238E27FC236}">
-                <a16:creationId xmlns:a16="http://schemas.microsoft.com/office/drawing/2014/main" id="{80851CBC-6CCA-A916-ED75-20FD89A52C05}"/>
+                <a16:creationId xmlns:a16="http://schemas.microsoft.com/office/drawing/2014/main" id="{6F6230D6-C33B-01E0-A05E-4F2F9029721D}"/>
               </a:ext>
             </a:extLst>
           </p:cNvPr>
@@ -17601,720 +18235,26 @@
         </p:blipFill>
         <p:spPr>
           <a:xfrm>
-            <a:off x="5188295" y="1807069"/>
-            <a:ext cx="5137557" cy="4058509"/>
+            <a:off x="5492430" y="1877263"/>
+            <a:ext cx="6072217" cy="3536801"/>
           </a:xfrm>
           <a:prstGeom prst="rect">
             <a:avLst/>
           </a:prstGeom>
           <a:ln>
-            <a:noFill/>
+            <a:solidFill>
+              <a:schemeClr val="tx1">
+                <a:lumMod val="65000"/>
+                <a:lumOff val="35000"/>
+              </a:schemeClr>
+            </a:solidFill>
           </a:ln>
-          <a:effectLst>
-            <a:outerShdw blurRad="190500" algn="tl" rotWithShape="0">
-              <a:srgbClr val="000000">
-                <a:alpha val="70000"/>
-              </a:srgbClr>
-            </a:outerShdw>
-          </a:effectLst>
         </p:spPr>
       </p:pic>
     </p:spTree>
     <p:extLst>
       <p:ext uri="{BB962C8B-B14F-4D97-AF65-F5344CB8AC3E}">
         <p14:creationId xmlns:p14="http://schemas.microsoft.com/office/powerpoint/2010/main" val="3861659691"/>
-      </p:ext>
-    </p:extLst>
-  </p:cSld>
-  <p:clrMapOvr>
-    <a:masterClrMapping/>
-  </p:clrMapOvr>
-</p:sld>
-</file>
-
-<file path=ppt/slides/slide9.xml><?xml version="1.0" encoding="utf-8"?>
-<p:sld xmlns:a="http://schemas.openxmlformats.org/drawingml/2006/main" xmlns:r="http://schemas.openxmlformats.org/officeDocument/2006/relationships" xmlns:p="http://schemas.openxmlformats.org/presentationml/2006/main">
-  <p:cSld>
-    <p:spTree>
-      <p:nvGrpSpPr>
-        <p:cNvPr id="1" name=""/>
-        <p:cNvGrpSpPr/>
-        <p:nvPr/>
-      </p:nvGrpSpPr>
-      <p:grpSpPr>
-        <a:xfrm>
-          <a:off x="0" y="0"/>
-          <a:ext cx="0" cy="0"/>
-          <a:chOff x="0" y="0"/>
-          <a:chExt cx="0" cy="0"/>
-        </a:xfrm>
-      </p:grpSpPr>
-      <p:sp>
-        <p:nvSpPr>
-          <p:cNvPr id="2" name="Shape 0"/>
-          <p:cNvSpPr/>
-          <p:nvPr/>
-        </p:nvSpPr>
-        <p:spPr>
-          <a:xfrm>
-            <a:off x="0" y="0"/>
-            <a:ext cx="12191695" cy="6858000"/>
-          </a:xfrm>
-          <a:prstGeom prst="rect">
-            <a:avLst/>
-          </a:prstGeom>
-          <a:solidFill>
-            <a:srgbClr val="F3F4F6"/>
-          </a:solidFill>
-          <a:ln w="12700">
-            <a:solidFill>
-              <a:srgbClr val="FFFFFF">
-                <a:alpha val="0"/>
-              </a:srgbClr>
-            </a:solidFill>
-            <a:prstDash val="solid"/>
-          </a:ln>
-        </p:spPr>
-        <p:txBody>
-          <a:bodyPr/>
-          <a:lstStyle/>
-          <a:p>
-            <a:endParaRPr lang="ja-JP" altLang="en-US"/>
-          </a:p>
-        </p:txBody>
-      </p:sp>
-      <p:sp>
-        <p:nvSpPr>
-          <p:cNvPr id="3" name="Shape 1"/>
-          <p:cNvSpPr/>
-          <p:nvPr/>
-        </p:nvSpPr>
-        <p:spPr>
-          <a:xfrm>
-            <a:off x="0" y="0"/>
-            <a:ext cx="12191695" cy="6858000"/>
-          </a:xfrm>
-          <a:prstGeom prst="rect">
-            <a:avLst/>
-          </a:prstGeom>
-          <a:solidFill>
-            <a:srgbClr val="FFFFFF"/>
-          </a:solidFill>
-          <a:ln w="12700">
-            <a:solidFill>
-              <a:srgbClr val="FFFFFF">
-                <a:alpha val="0"/>
-              </a:srgbClr>
-            </a:solidFill>
-            <a:prstDash val="solid"/>
-          </a:ln>
-          <a:effectLst>
-            <a:outerShdw blurRad="63500" dist="38100" dir="16200000" algn="bl" rotWithShape="0">
-              <a:srgbClr val="000000">
-                <a:alpha val="10000"/>
-              </a:srgbClr>
-            </a:outerShdw>
-          </a:effectLst>
-        </p:spPr>
-        <p:txBody>
-          <a:bodyPr/>
-          <a:lstStyle/>
-          <a:p>
-            <a:endParaRPr lang="ja-JP" altLang="en-US"/>
-          </a:p>
-        </p:txBody>
-      </p:sp>
-      <p:sp>
-        <p:nvSpPr>
-          <p:cNvPr id="4" name="Shape 2"/>
-          <p:cNvSpPr/>
-          <p:nvPr/>
-        </p:nvSpPr>
-        <p:spPr>
-          <a:xfrm>
-            <a:off x="0" y="0"/>
-            <a:ext cx="12191695" cy="1485900"/>
-          </a:xfrm>
-          <a:prstGeom prst="rect">
-            <a:avLst/>
-          </a:prstGeom>
-          <a:solidFill>
-            <a:srgbClr val="FFFFFF"/>
-          </a:solidFill>
-          <a:ln/>
-        </p:spPr>
-        <p:txBody>
-          <a:bodyPr/>
-          <a:lstStyle/>
-          <a:p>
-            <a:endParaRPr lang="ja-JP" altLang="en-US"/>
-          </a:p>
-        </p:txBody>
-      </p:sp>
-      <p:sp>
-        <p:nvSpPr>
-          <p:cNvPr id="5" name="Shape 3"/>
-          <p:cNvSpPr/>
-          <p:nvPr/>
-        </p:nvSpPr>
-        <p:spPr>
-          <a:xfrm>
-            <a:off x="0" y="1476756"/>
-            <a:ext cx="12191695" cy="9144"/>
-          </a:xfrm>
-          <a:prstGeom prst="rect">
-            <a:avLst/>
-          </a:prstGeom>
-          <a:solidFill>
-            <a:srgbClr val="F3F4F6"/>
-          </a:solidFill>
-          <a:ln w="12700">
-            <a:solidFill>
-              <a:srgbClr val="F3F4F6">
-                <a:alpha val="0"/>
-              </a:srgbClr>
-            </a:solidFill>
-            <a:prstDash val="solid"/>
-          </a:ln>
-        </p:spPr>
-        <p:txBody>
-          <a:bodyPr/>
-          <a:lstStyle/>
-          <a:p>
-            <a:endParaRPr lang="ja-JP" altLang="en-US"/>
-          </a:p>
-        </p:txBody>
-      </p:sp>
-      <p:sp>
-        <p:nvSpPr>
-          <p:cNvPr id="6" name="Text 4"/>
-          <p:cNvSpPr txBox="1"/>
-          <p:nvPr/>
-        </p:nvSpPr>
-        <p:spPr>
-          <a:xfrm>
-            <a:off x="457200" y="228600"/>
-            <a:ext cx="5600700" cy="267005"/>
-          </a:xfrm>
-          <a:prstGeom prst="rect">
-            <a:avLst/>
-          </a:prstGeom>
-          <a:noFill/>
-          <a:ln/>
-        </p:spPr>
-        <p:txBody>
-          <a:bodyPr wrap="square" lIns="0" tIns="0" rIns="0" bIns="0" rtlCol="0" anchor="ctr"/>
-          <a:lstStyle/>
-          <a:p>
-            <a:pPr marL="0" indent="0" algn="l">
-              <a:buNone/>
-            </a:pPr>
-            <a:r>
-              <a:rPr lang="en-US" sz="1600" b="1" kern="0" spc="150" dirty="0">
-                <a:solidFill>
-                  <a:srgbClr val="6B7280"/>
-                </a:solidFill>
-                <a:latin typeface="Noto Sans JP" pitchFamily="34" charset="0"/>
-                <a:ea typeface="Noto Sans JP" pitchFamily="34" charset="-122"/>
-                <a:cs typeface="Noto Sans JP" pitchFamily="34" charset="-120"/>
-              </a:rPr>
-              <a:t>PA45｜第9回</a:t>
-            </a:r>
-            <a:endParaRPr lang="en-US" sz="1500" dirty="0"/>
-          </a:p>
-        </p:txBody>
-      </p:sp>
-      <p:sp>
-        <p:nvSpPr>
-          <p:cNvPr id="8" name="Shape 6"/>
-          <p:cNvSpPr/>
-          <p:nvPr/>
-        </p:nvSpPr>
-        <p:spPr>
-          <a:xfrm>
-            <a:off x="10858500" y="828446"/>
-            <a:ext cx="114300" cy="114300"/>
-          </a:xfrm>
-          <a:prstGeom prst="ellipse">
-            <a:avLst/>
-          </a:prstGeom>
-          <a:solidFill>
-            <a:srgbClr val="0078D4"/>
-          </a:solidFill>
-          <a:ln w="12700">
-            <a:solidFill>
-              <a:srgbClr val="FFFFFF">
-                <a:alpha val="0"/>
-              </a:srgbClr>
-            </a:solidFill>
-            <a:prstDash val="solid"/>
-          </a:ln>
-        </p:spPr>
-        <p:txBody>
-          <a:bodyPr/>
-          <a:lstStyle/>
-          <a:p>
-            <a:endParaRPr lang="ja-JP" altLang="en-US"/>
-          </a:p>
-        </p:txBody>
-      </p:sp>
-      <p:sp>
-        <p:nvSpPr>
-          <p:cNvPr id="9" name="Text 7"/>
-          <p:cNvSpPr txBox="1"/>
-          <p:nvPr/>
-        </p:nvSpPr>
-        <p:spPr>
-          <a:xfrm>
-            <a:off x="11048695" y="752551"/>
-            <a:ext cx="771754" cy="267005"/>
-          </a:xfrm>
-          <a:prstGeom prst="rect">
-            <a:avLst/>
-          </a:prstGeom>
-          <a:noFill/>
-          <a:ln/>
-        </p:spPr>
-        <p:txBody>
-          <a:bodyPr wrap="square" lIns="0" tIns="0" rIns="0" bIns="0" rtlCol="0" anchor="ctr"/>
-          <a:lstStyle/>
-          <a:p>
-            <a:pPr marL="0" indent="0" algn="l">
-              <a:buNone/>
-            </a:pPr>
-            <a:r>
-              <a:rPr lang="en-US" sz="1600" dirty="0">
-                <a:solidFill>
-                  <a:srgbClr val="9CA3AF"/>
-                </a:solidFill>
-                <a:latin typeface="ui-monospace" pitchFamily="34" charset="0"/>
-                <a:ea typeface="ui-monospace" pitchFamily="34" charset="-122"/>
-                <a:cs typeface="ui-monospace" pitchFamily="34" charset="-120"/>
-              </a:rPr>
-              <a:t>Concept</a:t>
-            </a:r>
-            <a:endParaRPr lang="en-US" sz="1500" dirty="0"/>
-          </a:p>
-        </p:txBody>
-      </p:sp>
-      <p:sp>
-        <p:nvSpPr>
-          <p:cNvPr id="13" name="Shape 9"/>
-          <p:cNvSpPr/>
-          <p:nvPr/>
-        </p:nvSpPr>
-        <p:spPr>
-          <a:xfrm>
-            <a:off x="-1" y="1501341"/>
-            <a:ext cx="12191695" cy="4914900"/>
-          </a:xfrm>
-          <a:prstGeom prst="rect">
-            <a:avLst/>
-          </a:prstGeom>
-          <a:solidFill>
-            <a:srgbClr val="F9FAFB"/>
-          </a:solidFill>
-          <a:ln w="12700">
-            <a:solidFill>
-              <a:srgbClr val="FFFFFF">
-                <a:alpha val="0"/>
-              </a:srgbClr>
-            </a:solidFill>
-            <a:prstDash val="solid"/>
-          </a:ln>
-        </p:spPr>
-        <p:txBody>
-          <a:bodyPr/>
-          <a:lstStyle/>
-          <a:p>
-            <a:endParaRPr lang="ja-JP" altLang="en-US"/>
-          </a:p>
-        </p:txBody>
-      </p:sp>
-      <p:pic>
-        <p:nvPicPr>
-          <p:cNvPr id="23" name="Image 8" descr="preencoded.png"/>
-          <p:cNvPicPr>
-            <a:picLocks noChangeAspect="1"/>
-          </p:cNvPicPr>
-          <p:nvPr/>
-        </p:nvPicPr>
-        <p:blipFill>
-          <a:blip/>
-          <a:srcRect t="-401" b="-401"/>
-          <a:stretch/>
-        </p:blipFill>
-        <p:spPr>
-          <a:xfrm>
-            <a:off x="0" y="6801307"/>
-            <a:ext cx="12191695" cy="57607"/>
-          </a:xfrm>
-          <a:prstGeom prst="rect">
-            <a:avLst/>
-          </a:prstGeom>
-        </p:spPr>
-      </p:pic>
-      <p:sp>
-        <p:nvSpPr>
-          <p:cNvPr id="39" name="Shape 22"/>
-          <p:cNvSpPr/>
-          <p:nvPr/>
-        </p:nvSpPr>
-        <p:spPr>
-          <a:xfrm>
-            <a:off x="0" y="6400800"/>
-            <a:ext cx="12191695" cy="457200"/>
-          </a:xfrm>
-          <a:prstGeom prst="rect">
-            <a:avLst/>
-          </a:prstGeom>
-          <a:solidFill>
-            <a:srgbClr val="FFFFFF"/>
-          </a:solidFill>
-          <a:ln/>
-        </p:spPr>
-        <p:txBody>
-          <a:bodyPr/>
-          <a:lstStyle/>
-          <a:p>
-            <a:endParaRPr lang="ja-JP" altLang="en-US"/>
-          </a:p>
-        </p:txBody>
-      </p:sp>
-      <p:sp>
-        <p:nvSpPr>
-          <p:cNvPr id="40" name="Shape 23"/>
-          <p:cNvSpPr/>
-          <p:nvPr/>
-        </p:nvSpPr>
-        <p:spPr>
-          <a:xfrm>
-            <a:off x="0" y="6400800"/>
-            <a:ext cx="12191695" cy="9144"/>
-          </a:xfrm>
-          <a:prstGeom prst="rect">
-            <a:avLst/>
-          </a:prstGeom>
-          <a:solidFill>
-            <a:srgbClr val="E5E7EB"/>
-          </a:solidFill>
-          <a:ln w="12700">
-            <a:solidFill>
-              <a:srgbClr val="E5E7EB">
-                <a:alpha val="0"/>
-              </a:srgbClr>
-            </a:solidFill>
-            <a:prstDash val="solid"/>
-          </a:ln>
-        </p:spPr>
-        <p:txBody>
-          <a:bodyPr/>
-          <a:lstStyle/>
-          <a:p>
-            <a:endParaRPr lang="ja-JP" altLang="en-US"/>
-          </a:p>
-        </p:txBody>
-      </p:sp>
-      <p:sp>
-        <p:nvSpPr>
-          <p:cNvPr id="41" name="Text 24"/>
-          <p:cNvSpPr txBox="1"/>
-          <p:nvPr/>
-        </p:nvSpPr>
-        <p:spPr>
-          <a:xfrm>
-            <a:off x="457200" y="6519672"/>
-            <a:ext cx="2573122" cy="228600"/>
-          </a:xfrm>
-          <a:prstGeom prst="rect">
-            <a:avLst/>
-          </a:prstGeom>
-          <a:noFill/>
-          <a:ln/>
-        </p:spPr>
-        <p:txBody>
-          <a:bodyPr wrap="square" lIns="0" tIns="0" rIns="0" bIns="0" rtlCol="0" anchor="ctr"/>
-          <a:lstStyle/>
-          <a:p>
-            <a:pPr marL="0" indent="0" algn="l">
-              <a:buNone/>
-            </a:pPr>
-            <a:r>
-              <a:rPr lang="en-US" sz="1600" dirty="0">
-                <a:solidFill>
-                  <a:srgbClr val="9CA3AF"/>
-                </a:solidFill>
-                <a:latin typeface="Noto Sans JP" pitchFamily="34" charset="0"/>
-                <a:ea typeface="Noto Sans JP" pitchFamily="34" charset="-122"/>
-                <a:cs typeface="Noto Sans JP" pitchFamily="34" charset="-120"/>
-              </a:rPr>
-              <a:t>Power Automate for Beginners</a:t>
-            </a:r>
-            <a:endParaRPr lang="en-US" sz="1200" dirty="0"/>
-          </a:p>
-        </p:txBody>
-      </p:sp>
-      <p:sp>
-        <p:nvSpPr>
-          <p:cNvPr id="42" name="Text 25"/>
-          <p:cNvSpPr txBox="1"/>
-          <p:nvPr/>
-        </p:nvSpPr>
-        <p:spPr>
-          <a:xfrm>
-            <a:off x="10490911" y="6519672"/>
-            <a:ext cx="1484986" cy="228600"/>
-          </a:xfrm>
-          <a:prstGeom prst="rect">
-            <a:avLst/>
-          </a:prstGeom>
-          <a:noFill/>
-          <a:ln/>
-        </p:spPr>
-        <p:txBody>
-          <a:bodyPr wrap="square" lIns="0" tIns="0" rIns="0" bIns="0" rtlCol="0" anchor="ctr"/>
-          <a:lstStyle/>
-          <a:p>
-            <a:pPr marL="0" indent="0" algn="l">
-              <a:buNone/>
-            </a:pPr>
-            <a:r>
-              <a:rPr lang="en-US" sz="1600" dirty="0">
-                <a:solidFill>
-                  <a:srgbClr val="9CA3AF"/>
-                </a:solidFill>
-                <a:latin typeface="Noto Sans JP" pitchFamily="34" charset="0"/>
-                <a:ea typeface="Noto Sans JP" pitchFamily="34" charset="-122"/>
-                <a:cs typeface="Noto Sans JP" pitchFamily="34" charset="-120"/>
-              </a:rPr>
-              <a:t>Copyright © PA45</a:t>
-            </a:r>
-            <a:endParaRPr lang="en-US" sz="1200" dirty="0"/>
-          </a:p>
-        </p:txBody>
-      </p:sp>
-      <p:grpSp>
-        <p:nvGrpSpPr>
-          <p:cNvPr id="47" name="グループ化 46">
-            <a:extLst>
-              <a:ext uri="{FF2B5EF4-FFF2-40B4-BE49-F238E27FC236}">
-                <a16:creationId xmlns:a16="http://schemas.microsoft.com/office/drawing/2014/main" id="{722FBEAE-8CB7-7493-F595-CD1F2E21BD05}"/>
-              </a:ext>
-            </a:extLst>
-          </p:cNvPr>
-          <p:cNvGrpSpPr/>
-          <p:nvPr/>
-        </p:nvGrpSpPr>
-        <p:grpSpPr>
-          <a:xfrm>
-            <a:off x="4814990" y="6322778"/>
-            <a:ext cx="7139243" cy="405006"/>
-            <a:chOff x="6034969" y="604238"/>
-            <a:chExt cx="5862289" cy="405006"/>
-          </a:xfrm>
-        </p:grpSpPr>
-        <p:sp>
-          <p:nvSpPr>
-            <p:cNvPr id="48" name="Shape 31">
-              <a:extLst>
-                <a:ext uri="{FF2B5EF4-FFF2-40B4-BE49-F238E27FC236}">
-                  <a16:creationId xmlns:a16="http://schemas.microsoft.com/office/drawing/2014/main" id="{DD44BB3C-F859-7A5E-7E34-CC1C35ECEA4D}"/>
-                </a:ext>
-              </a:extLst>
-            </p:cNvPr>
-            <p:cNvSpPr/>
-            <p:nvPr/>
-          </p:nvSpPr>
-          <p:spPr>
-            <a:xfrm>
-              <a:off x="6034969" y="604238"/>
-              <a:ext cx="5854549" cy="386057"/>
-            </a:xfrm>
-            <a:prstGeom prst="roundRect">
-              <a:avLst>
-                <a:gd name="adj" fmla="val 342465"/>
-              </a:avLst>
-            </a:prstGeom>
-            <a:solidFill>
-              <a:srgbClr val="EFF6FF"/>
-            </a:solidFill>
-            <a:ln w="12700">
-              <a:solidFill>
-                <a:srgbClr val="FFFFFF">
-                  <a:alpha val="0"/>
-                </a:srgbClr>
-              </a:solidFill>
-              <a:prstDash val="solid"/>
-            </a:ln>
-          </p:spPr>
-          <p:txBody>
-            <a:bodyPr/>
-            <a:lstStyle/>
-            <a:p>
-              <a:endParaRPr lang="ja-JP" altLang="en-US"/>
-            </a:p>
-          </p:txBody>
-        </p:sp>
-        <p:sp>
-          <p:nvSpPr>
-            <p:cNvPr id="49" name="Text 21">
-              <a:extLst>
-                <a:ext uri="{FF2B5EF4-FFF2-40B4-BE49-F238E27FC236}">
-                  <a16:creationId xmlns:a16="http://schemas.microsoft.com/office/drawing/2014/main" id="{A7F44BB1-1667-BB85-557B-D7C1AAD8A0FA}"/>
-                </a:ext>
-              </a:extLst>
-            </p:cNvPr>
-            <p:cNvSpPr txBox="1"/>
-            <p:nvPr/>
-          </p:nvSpPr>
-          <p:spPr>
-            <a:xfrm>
-              <a:off x="6287649" y="612651"/>
-              <a:ext cx="5609609" cy="396593"/>
-            </a:xfrm>
-            <a:prstGeom prst="rect">
-              <a:avLst/>
-            </a:prstGeom>
-            <a:noFill/>
-            <a:ln/>
-          </p:spPr>
-          <p:txBody>
-            <a:bodyPr wrap="square" lIns="0" tIns="0" rIns="0" bIns="0" rtlCol="0" anchor="ctr"/>
-            <a:lstStyle/>
-            <a:p>
-              <a:pPr marL="0" indent="0" algn="l">
-                <a:buNone/>
-              </a:pPr>
-              <a:r>
-                <a:rPr lang="en-US" sz="1400" b="1" dirty="0">
-                  <a:solidFill>
-                    <a:srgbClr val="2563EB"/>
-                  </a:solidFill>
-                  <a:latin typeface="Noto Sans JP" pitchFamily="34" charset="0"/>
-                  <a:ea typeface="Noto Sans JP" pitchFamily="34" charset="-122"/>
-                  <a:cs typeface="Noto Sans JP" pitchFamily="34" charset="-120"/>
-                </a:rPr>
-                <a:t>学んだこと・気づいたことを #</a:t>
-              </a:r>
-              <a:r>
-                <a:rPr lang="en-US" sz="1400" b="1">
-                  <a:solidFill>
-                    <a:srgbClr val="2563EB"/>
-                  </a:solidFill>
-                  <a:latin typeface="Noto Sans JP" pitchFamily="34" charset="0"/>
-                  <a:ea typeface="Noto Sans JP" pitchFamily="34" charset="-122"/>
-                  <a:cs typeface="Noto Sans JP" pitchFamily="34" charset="-120"/>
-                </a:rPr>
-                <a:t>PA45 で</a:t>
-              </a:r>
-              <a:r>
-                <a:rPr lang="ja-JP" altLang="en-US" sz="1400" b="1">
-                  <a:solidFill>
-                    <a:srgbClr val="2563EB"/>
-                  </a:solidFill>
-                  <a:latin typeface="Noto Sans JP" pitchFamily="34" charset="0"/>
-                  <a:ea typeface="Noto Sans JP" pitchFamily="34" charset="-122"/>
-                  <a:cs typeface="Noto Sans JP" pitchFamily="34" charset="-120"/>
-                </a:rPr>
-                <a:t>リアルタイムに</a:t>
-              </a:r>
-              <a:r>
-                <a:rPr lang="en-US" sz="1400" b="1">
-                  <a:solidFill>
-                    <a:srgbClr val="2563EB"/>
-                  </a:solidFill>
-                  <a:latin typeface="Noto Sans JP" pitchFamily="34" charset="0"/>
-                  <a:ea typeface="Noto Sans JP" pitchFamily="34" charset="-122"/>
-                  <a:cs typeface="Noto Sans JP" pitchFamily="34" charset="-120"/>
-                </a:rPr>
-                <a:t>投稿しよう！</a:t>
-              </a:r>
-              <a:r>
-                <a:rPr lang="ja-JP" altLang="en-US" sz="1400" b="1">
-                  <a:solidFill>
-                    <a:srgbClr val="2563EB"/>
-                  </a:solidFill>
-                  <a:latin typeface="Noto Sans JP" pitchFamily="34" charset="0"/>
-                  <a:ea typeface="Noto Sans JP" pitchFamily="34" charset="-122"/>
-                  <a:cs typeface="Noto Sans JP" pitchFamily="34" charset="-120"/>
-                </a:rPr>
-                <a:t>スクショ</a:t>
-              </a:r>
-              <a:r>
-                <a:rPr lang="en-US" altLang="ja-JP" sz="1400" b="1">
-                  <a:solidFill>
-                    <a:srgbClr val="2563EB"/>
-                  </a:solidFill>
-                  <a:latin typeface="Noto Sans JP" pitchFamily="34" charset="0"/>
-                  <a:ea typeface="Noto Sans JP" pitchFamily="34" charset="-122"/>
-                  <a:cs typeface="Noto Sans JP" pitchFamily="34" charset="-120"/>
-                </a:rPr>
-                <a:t>OK</a:t>
-              </a:r>
-              <a:r>
-                <a:rPr lang="ja-JP" altLang="en-US" sz="1400" b="1">
-                  <a:solidFill>
-                    <a:srgbClr val="2563EB"/>
-                  </a:solidFill>
-                  <a:latin typeface="Noto Sans JP" pitchFamily="34" charset="0"/>
-                  <a:ea typeface="Noto Sans JP" pitchFamily="34" charset="-122"/>
-                  <a:cs typeface="Noto Sans JP" pitchFamily="34" charset="-120"/>
-                </a:rPr>
-                <a:t>！</a:t>
-              </a:r>
-              <a:endParaRPr lang="en-US" sz="1400" dirty="0"/>
-            </a:p>
-          </p:txBody>
-        </p:sp>
-      </p:grpSp>
-      <p:sp>
-        <p:nvSpPr>
-          <p:cNvPr id="10" name="Text 5">
-            <a:extLst>
-              <a:ext uri="{FF2B5EF4-FFF2-40B4-BE49-F238E27FC236}">
-                <a16:creationId xmlns:a16="http://schemas.microsoft.com/office/drawing/2014/main" id="{0DA7D246-5DFE-385C-DC4F-E8A338DB3505}"/>
-              </a:ext>
-            </a:extLst>
-          </p:cNvPr>
-          <p:cNvSpPr txBox="1"/>
-          <p:nvPr/>
-        </p:nvSpPr>
-        <p:spPr>
-          <a:xfrm>
-            <a:off x="3030322" y="3331497"/>
-            <a:ext cx="8169837" cy="810410"/>
-          </a:xfrm>
-          <a:prstGeom prst="rect">
-            <a:avLst/>
-          </a:prstGeom>
-          <a:noFill/>
-          <a:ln/>
-        </p:spPr>
-        <p:txBody>
-          <a:bodyPr wrap="square" lIns="0" tIns="0" rIns="0" bIns="0" rtlCol="0" anchor="ctr"/>
-          <a:lstStyle/>
-          <a:p>
-            <a:pPr marL="0" indent="0" algn="l">
-              <a:buNone/>
-            </a:pPr>
-            <a:r>
-              <a:rPr lang="ja-JP" altLang="en-US" sz="4400" b="1">
-                <a:solidFill>
-                  <a:srgbClr val="6B7280"/>
-                </a:solidFill>
-                <a:latin typeface="Noto Sans JP" pitchFamily="34" charset="0"/>
-                <a:ea typeface="Noto Sans JP" pitchFamily="34" charset="-122"/>
-              </a:rPr>
-              <a:t>ハンズオン行きましょう。</a:t>
-            </a:r>
-            <a:endParaRPr lang="en-US" sz="7200" dirty="0"/>
-          </a:p>
-        </p:txBody>
-      </p:sp>
-    </p:spTree>
-    <p:extLst>
-      <p:ext uri="{BB962C8B-B14F-4D97-AF65-F5344CB8AC3E}">
-        <p14:creationId xmlns:p14="http://schemas.microsoft.com/office/powerpoint/2010/main" val="1541831861"/>
       </p:ext>
     </p:extLst>
   </p:cSld>

--- a/assets/pa45/P009_PA45_SharePointTeams_20260507.pptx
+++ b/assets/pa45/P009_PA45_SharePointTeams_20260507.pptx
@@ -7355,7 +7355,7 @@
                   <a:srgbClr val="FFFFFF"/>
                 </a:solidFill>
               </a:rPr>
-              <a:t>ハンズオン 事前準備のお願い（3分でできます）</a:t>
+              <a:t>ハンズオン 事前準備（3分でできます）</a:t>
             </a:r>
           </a:p>
         </p:txBody>
@@ -7568,7 +7568,57 @@
                 <a:latin typeface="+mj-ea"/>
                 <a:ea typeface="+mj-ea"/>
               </a:rPr>
-              <a:t>②  「ドキュメント」ライブラリを開く</a:t>
+              <a:t>②  </a:t>
+            </a:r>
+            <a:r>
+              <a:rPr lang="ja-JP" altLang="en-US" sz="1400" b="1">
+                <a:solidFill>
+                  <a:srgbClr val="333333"/>
+                </a:solidFill>
+                <a:latin typeface="+mj-ea"/>
+                <a:ea typeface="+mj-ea"/>
+              </a:rPr>
+              <a:t>設定</a:t>
+            </a:r>
+            <a:r>
+              <a:rPr lang="en-US" altLang="ja-JP" sz="1400" b="1">
+                <a:solidFill>
+                  <a:srgbClr val="333333"/>
+                </a:solidFill>
+                <a:latin typeface="+mj-ea"/>
+                <a:ea typeface="+mj-ea"/>
+              </a:rPr>
+              <a:t>(</a:t>
+            </a:r>
+            <a:r>
+              <a:rPr lang="ja-JP" altLang="en-US" sz="1400" b="1">
+                <a:solidFill>
+                  <a:srgbClr val="333333"/>
+                </a:solidFill>
+                <a:latin typeface="+mj-ea"/>
+                <a:ea typeface="+mj-ea"/>
+              </a:rPr>
+              <a:t>歯車</a:t>
+            </a:r>
+            <a:r>
+              <a:rPr lang="en-US" altLang="ja-JP" sz="1400" b="1">
+                <a:solidFill>
+                  <a:srgbClr val="333333"/>
+                </a:solidFill>
+                <a:latin typeface="+mj-ea"/>
+                <a:ea typeface="+mj-ea"/>
+              </a:rPr>
+              <a:t>)</a:t>
+            </a:r>
+            <a:r>
+              <a:rPr sz="1400" b="1">
+                <a:solidFill>
+                  <a:srgbClr val="333333"/>
+                </a:solidFill>
+                <a:latin typeface="+mj-ea"/>
+                <a:ea typeface="+mj-ea"/>
+              </a:rPr>
+              <a:t>「ドキュメント」ライブラリを開く</a:t>
             </a:r>
           </a:p>
           <a:p>
@@ -7585,8 +7635,25 @@
                 <a:latin typeface="+mj-ea"/>
                 <a:ea typeface="+mj-ea"/>
               </a:rPr>
-              <a:t>③  「アップロード → ファイル」で approval-sample.xlsx を選択</a:t>
-            </a:r>
+              <a:t>③  「アップロード → ファイル」で approval-sample.xlsx を選</a:t>
+            </a:r>
+            <a:r>
+              <a:rPr lang="ja-JP" altLang="en-US" sz="1400" b="1">
+                <a:solidFill>
+                  <a:srgbClr val="333333"/>
+                </a:solidFill>
+                <a:latin typeface="+mj-ea"/>
+                <a:ea typeface="+mj-ea"/>
+              </a:rPr>
+              <a:t>択</a:t>
+            </a:r>
+            <a:endParaRPr sz="1400" b="1">
+              <a:solidFill>
+                <a:srgbClr val="333333"/>
+              </a:solidFill>
+              <a:latin typeface="+mj-ea"/>
+              <a:ea typeface="+mj-ea"/>
+            </a:endParaRPr>
           </a:p>
           <a:p>
             <a:pPr>
@@ -7603,39 +7670,6 @@
                 <a:ea typeface="+mj-ea"/>
               </a:rPr>
               <a:t>④  完了！  当日はこのファイルを上司役で更新する想定でフローを作ります</a:t>
-            </a:r>
-          </a:p>
-        </p:txBody>
-      </p:sp>
-      <p:sp>
-        <p:nvSpPr>
-          <p:cNvPr id="6" name="TextBox 5"/>
-          <p:cNvSpPr txBox="1"/>
-          <p:nvPr/>
-        </p:nvSpPr>
-        <p:spPr>
-          <a:xfrm>
-            <a:off x="548640" y="6035040"/>
-            <a:ext cx="7957628" cy="369332"/>
-          </a:xfrm>
-          <a:prstGeom prst="rect">
-            <a:avLst/>
-          </a:prstGeom>
-          <a:noFill/>
-        </p:spPr>
-        <p:txBody>
-          <a:bodyPr wrap="none">
-            <a:spAutoFit/>
-          </a:bodyPr>
-          <a:lstStyle/>
-          <a:p>
-            <a:r>
-              <a:rPr b="1">
-                <a:solidFill>
-                  <a:srgbClr val="888888"/>
-                </a:solidFill>
-              </a:rPr>
-              <a:t>※ 配置済みだとハンズオンに専念できます。当日その場で配置してもOK！</a:t>
             </a:r>
           </a:p>
         </p:txBody>
@@ -17222,7 +17256,7 @@
                 <a:ea typeface="Noto Sans JP" pitchFamily="34" charset="-122"/>
                 <a:cs typeface="Noto Sans JP" pitchFamily="34" charset="-120"/>
               </a:rPr>
-              <a:t>②トリガー出力からファイル名・更新者・URLを取得する。</a:t>
+              <a:t>②トリガー出力からファイル名・更新者・を取得する。</a:t>
             </a:r>
             <a:endParaRPr lang="en-US" altLang="ja-JP" sz="2000" b="1">
               <a:solidFill>
@@ -17259,7 +17293,7 @@
                 <a:ea typeface="Noto Sans JP" pitchFamily="34" charset="-122"/>
                 <a:cs typeface="Noto Sans JP" pitchFamily="34" charset="-120"/>
               </a:rPr>
-              <a:t>③（任意）条件分岐でフォルダ・拡張子・更新者で絞り込み、</a:t>
+              <a:t>③（任意）条件分岐でファイル名・更新者で絞り込み、</a:t>
             </a:r>
           </a:p>
           <a:p>
@@ -17376,6 +17410,36 @@
               </a:schemeClr>
             </a:solidFill>
           </a:ln>
+        </p:spPr>
+      </p:pic>
+      <p:pic>
+        <p:nvPicPr>
+          <p:cNvPr id="12" name="図 11" descr="A cartoon child with a blue shirt is pointing towards an illustration of an open eye with a light bulb.&#10;&#10;AI 生成コンテンツは誤りを含む可能性があります。">
+            <a:extLst>
+              <a:ext uri="{FF2B5EF4-FFF2-40B4-BE49-F238E27FC236}">
+                <a16:creationId xmlns:a16="http://schemas.microsoft.com/office/drawing/2014/main" id="{DCFEA6E0-2BC7-E886-FA98-B0724535F1F3}"/>
+              </a:ext>
+            </a:extLst>
+          </p:cNvPr>
+          <p:cNvPicPr>
+            <a:picLocks noChangeAspect="1"/>
+          </p:cNvPicPr>
+          <p:nvPr/>
+        </p:nvPicPr>
+        <p:blipFill>
+          <a:blip r:embed="rId3"/>
+          <a:stretch>
+            <a:fillRect/>
+          </a:stretch>
+        </p:blipFill>
+        <p:spPr>
+          <a:xfrm>
+            <a:off x="9809006" y="4595962"/>
+            <a:ext cx="1363810" cy="1613976"/>
+          </a:xfrm>
+          <a:prstGeom prst="rect">
+            <a:avLst/>
+          </a:prstGeom>
         </p:spPr>
       </p:pic>
     </p:spTree>
@@ -18249,6 +18313,36 @@
               </a:schemeClr>
             </a:solidFill>
           </a:ln>
+        </p:spPr>
+      </p:pic>
+      <p:pic>
+        <p:nvPicPr>
+          <p:cNvPr id="17" name="図 16" descr="A child is depicted wearing a bright orange shirt, standing on a grassy path, with two directional arrows pointing to the left and right, suggesting a decision or choice.&#10;&#10;AI 生成コンテンツは誤りを含む可能性があります。">
+            <a:extLst>
+              <a:ext uri="{FF2B5EF4-FFF2-40B4-BE49-F238E27FC236}">
+                <a16:creationId xmlns:a16="http://schemas.microsoft.com/office/drawing/2014/main" id="{95927E87-5192-8EEE-A8F3-BFFC6DBC3F0D}"/>
+              </a:ext>
+            </a:extLst>
+          </p:cNvPr>
+          <p:cNvPicPr>
+            <a:picLocks noChangeAspect="1"/>
+          </p:cNvPicPr>
+          <p:nvPr/>
+        </p:nvPicPr>
+        <p:blipFill>
+          <a:blip r:embed="rId4"/>
+          <a:stretch>
+            <a:fillRect/>
+          </a:stretch>
+        </p:blipFill>
+        <p:spPr>
+          <a:xfrm>
+            <a:off x="10003291" y="1803740"/>
+            <a:ext cx="1622652" cy="1660002"/>
+          </a:xfrm>
+          <a:prstGeom prst="rect">
+            <a:avLst/>
+          </a:prstGeom>
         </p:spPr>
       </p:pic>
     </p:spTree>
